--- a/FinLens_Presentation.pptx
+++ b/FinLens_Presentation.pptx
@@ -5,7 +5,7 @@
     <p:sldMasterId id="2147483648" r:id="rId1"/>
   </p:sldMasterIdLst>
   <p:notesMasterIdLst>
-    <p:notesMasterId r:id="rId14"/>
+    <p:notesMasterId r:id="rId15"/>
   </p:notesMasterIdLst>
   <p:sldIdLst>
     <p:sldId id="256" r:id="rId2"/>
@@ -20,6 +20,7 @@
     <p:sldId id="265" r:id="rId11"/>
     <p:sldId id="266" r:id="rId12"/>
     <p:sldId id="267" r:id="rId13"/>
+    <p:sldId id="269" r:id="rId14"/>
   </p:sldIdLst>
   <p:sldSz cx="9144000" cy="5143500" type="screen16x9"/>
   <p:notesSz cx="5143500" cy="9144000"/>
@@ -258,7 +259,7 @@
           <c:smooth val="0"/>
           <c:extLst>
             <c:ext xmlns:c16="http://schemas.microsoft.com/office/drawing/2014/chart" uri="{C3380CC4-5D6E-409C-BE32-E72D297353CC}">
-              <c16:uniqueId val="{00000000-9030-6148-B9E5-E0356DE97648}"/>
+              <c16:uniqueId val="{00000000-97DC-E040-A3A9-A416FCF5916C}"/>
             </c:ext>
           </c:extLst>
         </c:ser>
@@ -384,7 +385,7 @@
           <c:smooth val="0"/>
           <c:extLst>
             <c:ext xmlns:c16="http://schemas.microsoft.com/office/drawing/2014/chart" uri="{C3380CC4-5D6E-409C-BE32-E72D297353CC}">
-              <c16:uniqueId val="{00000001-9030-6148-B9E5-E0356DE97648}"/>
+              <c16:uniqueId val="{00000001-97DC-E040-A3A9-A416FCF5916C}"/>
             </c:ext>
           </c:extLst>
         </c:ser>
@@ -573,7 +574,7 @@
             </c:spPr>
             <c:extLst>
               <c:ext xmlns:c16="http://schemas.microsoft.com/office/drawing/2014/chart" uri="{C3380CC4-5D6E-409C-BE32-E72D297353CC}">
-                <c16:uniqueId val="{00000001-5C16-364C-A180-323B20584D85}"/>
+                <c16:uniqueId val="{00000001-01EC-BF4A-8FBE-C71D6BC3825F}"/>
               </c:ext>
             </c:extLst>
           </c:dPt>
@@ -589,7 +590,7 @@
             </c:spPr>
             <c:extLst>
               <c:ext xmlns:c16="http://schemas.microsoft.com/office/drawing/2014/chart" uri="{C3380CC4-5D6E-409C-BE32-E72D297353CC}">
-                <c16:uniqueId val="{00000003-5C16-364C-A180-323B20584D85}"/>
+                <c16:uniqueId val="{00000003-01EC-BF4A-8FBE-C71D6BC3825F}"/>
               </c:ext>
             </c:extLst>
           </c:dPt>
@@ -605,7 +606,7 @@
             </c:spPr>
             <c:extLst>
               <c:ext xmlns:c16="http://schemas.microsoft.com/office/drawing/2014/chart" uri="{C3380CC4-5D6E-409C-BE32-E72D297353CC}">
-                <c16:uniqueId val="{00000005-5C16-364C-A180-323B20584D85}"/>
+                <c16:uniqueId val="{00000005-01EC-BF4A-8FBE-C71D6BC3825F}"/>
               </c:ext>
             </c:extLst>
           </c:dPt>
@@ -683,7 +684,7 @@
           </c:val>
           <c:extLst>
             <c:ext xmlns:c16="http://schemas.microsoft.com/office/drawing/2014/chart" uri="{C3380CC4-5D6E-409C-BE32-E72D297353CC}">
-              <c16:uniqueId val="{00000006-5C16-364C-A180-323B20584D85}"/>
+              <c16:uniqueId val="{00000006-01EC-BF4A-8FBE-C71D6BC3825F}"/>
             </c:ext>
           </c:extLst>
         </c:ser>
@@ -1008,7 +1009,7 @@
           <c:smooth val="0"/>
           <c:extLst>
             <c:ext xmlns:c16="http://schemas.microsoft.com/office/drawing/2014/chart" uri="{C3380CC4-5D6E-409C-BE32-E72D297353CC}">
-              <c16:uniqueId val="{00000000-8179-0643-B251-16B7F4DD7234}"/>
+              <c16:uniqueId val="{00000000-1F6E-7245-81E9-4095C8713F89}"/>
             </c:ext>
           </c:extLst>
         </c:ser>
@@ -1191,7 +1192,7 @@
             </c:spPr>
             <c:extLst>
               <c:ext xmlns:c16="http://schemas.microsoft.com/office/drawing/2014/chart" uri="{C3380CC4-5D6E-409C-BE32-E72D297353CC}">
-                <c16:uniqueId val="{00000001-AD91-454F-A2DD-224F07D950CA}"/>
+                <c16:uniqueId val="{00000001-2BDE-3A44-984B-DF985C891B41}"/>
               </c:ext>
             </c:extLst>
           </c:dPt>
@@ -1207,7 +1208,7 @@
             </c:spPr>
             <c:extLst>
               <c:ext xmlns:c16="http://schemas.microsoft.com/office/drawing/2014/chart" uri="{C3380CC4-5D6E-409C-BE32-E72D297353CC}">
-                <c16:uniqueId val="{00000003-AD91-454F-A2DD-224F07D950CA}"/>
+                <c16:uniqueId val="{00000003-2BDE-3A44-984B-DF985C891B41}"/>
               </c:ext>
             </c:extLst>
           </c:dPt>
@@ -1223,7 +1224,7 @@
             </c:spPr>
             <c:extLst>
               <c:ext xmlns:c16="http://schemas.microsoft.com/office/drawing/2014/chart" uri="{C3380CC4-5D6E-409C-BE32-E72D297353CC}">
-                <c16:uniqueId val="{00000005-AD91-454F-A2DD-224F07D950CA}"/>
+                <c16:uniqueId val="{00000005-2BDE-3A44-984B-DF985C891B41}"/>
               </c:ext>
             </c:extLst>
           </c:dPt>
@@ -1239,7 +1240,7 @@
             </c:spPr>
             <c:extLst>
               <c:ext xmlns:c16="http://schemas.microsoft.com/office/drawing/2014/chart" uri="{C3380CC4-5D6E-409C-BE32-E72D297353CC}">
-                <c16:uniqueId val="{00000007-AD91-454F-A2DD-224F07D950CA}"/>
+                <c16:uniqueId val="{00000007-2BDE-3A44-984B-DF985C891B41}"/>
               </c:ext>
             </c:extLst>
           </c:dPt>
@@ -1323,7 +1324,7 @@
           </c:val>
           <c:extLst>
             <c:ext xmlns:c16="http://schemas.microsoft.com/office/drawing/2014/chart" uri="{C3380CC4-5D6E-409C-BE32-E72D297353CC}">
-              <c16:uniqueId val="{00000008-AD91-454F-A2DD-224F07D950CA}"/>
+              <c16:uniqueId val="{00000008-2BDE-3A44-984B-DF985C891B41}"/>
             </c:ext>
           </c:extLst>
         </c:ser>
@@ -1485,7 +1486,7 @@
     </p:spTree>
     <p:extLst>
       <p:ext uri="{BB962C8B-B14F-4D97-AF65-F5344CB8AC3E}">
-        <p14:creationId xmlns:p14="http://schemas.microsoft.com/office/powerpoint/2010/main" val="2871409683"/>
+        <p14:creationId xmlns:p14="http://schemas.microsoft.com/office/powerpoint/2010/main" val="2960265433"/>
       </p:ext>
     </p:extLst>
   </p:cSld>
@@ -1903,6 +1904,90 @@
             <a:fld id="{F7021451-1387-4CA6-816F-3879F97B5CBC}" type="slidenum">
               <a:rPr lang="en-US"/>
               <a:t>12</a:t>
+            </a:fld>
+            <a:endParaRPr lang="en-US"/>
+          </a:p>
+        </p:txBody>
+      </p:sp>
+    </p:spTree>
+    <p:extLst>
+      <p:ext uri="{BB962C8B-B14F-4D97-AF65-F5344CB8AC3E}">
+        <p14:creationId xmlns:p14="http://schemas.microsoft.com/office/powerpoint/2010/main" val="1024086991"/>
+      </p:ext>
+    </p:extLst>
+  </p:cSld>
+  <p:clrMapOvr>
+    <a:masterClrMapping/>
+  </p:clrMapOvr>
+</p:notes>
+</file>
+
+<file path=ppt/notesSlides/notesSlide13.xml><?xml version="1.0" encoding="utf-8"?>
+<p:notes xmlns:a="http://schemas.openxmlformats.org/drawingml/2006/main" xmlns:r="http://schemas.openxmlformats.org/officeDocument/2006/relationships" xmlns:p="http://schemas.openxmlformats.org/presentationml/2006/main">
+  <p:cSld>
+    <p:spTree>
+      <p:nvGrpSpPr>
+        <p:cNvPr id="1" name=""/>
+        <p:cNvGrpSpPr/>
+        <p:nvPr/>
+      </p:nvGrpSpPr>
+      <p:grpSpPr>
+        <a:xfrm>
+          <a:off x="0" y="0"/>
+          <a:ext cx="0" cy="0"/>
+          <a:chOff x="0" y="0"/>
+          <a:chExt cx="0" cy="0"/>
+        </a:xfrm>
+      </p:grpSpPr>
+      <p:sp>
+        <p:nvSpPr>
+          <p:cNvPr id="2" name="Slide Image Placeholder 1"/>
+          <p:cNvSpPr>
+            <a:spLocks noGrp="1" noRot="1" noChangeAspect="1"/>
+          </p:cNvSpPr>
+          <p:nvPr>
+            <p:ph type="sldImg"/>
+          </p:nvPr>
+        </p:nvSpPr>
+        <p:spPr/>
+      </p:sp>
+      <p:sp>
+        <p:nvSpPr>
+          <p:cNvPr id="3" name="Notes Placeholder 2"/>
+          <p:cNvSpPr>
+            <a:spLocks noGrp="1"/>
+          </p:cNvSpPr>
+          <p:nvPr>
+            <p:ph type="body" idx="1"/>
+          </p:nvPr>
+        </p:nvSpPr>
+        <p:spPr/>
+        <p:txBody>
+          <a:bodyPr/>
+          <a:lstStyle/>
+          <a:p>
+            <a:endParaRPr lang="en-US" dirty="0"/>
+          </a:p>
+        </p:txBody>
+      </p:sp>
+      <p:sp>
+        <p:nvSpPr>
+          <p:cNvPr id="4" name="Slide Number Placeholder 3"/>
+          <p:cNvSpPr>
+            <a:spLocks noGrp="1"/>
+          </p:cNvSpPr>
+          <p:nvPr>
+            <p:ph type="sldNum" sz="quarter" idx="10"/>
+          </p:nvPr>
+        </p:nvSpPr>
+        <p:spPr/>
+        <p:txBody>
+          <a:bodyPr/>
+          <a:lstStyle/>
+          <a:p>
+            <a:fld id="{F7021451-1387-4CA6-816F-3879F97B5CBC}" type="slidenum">
+              <a:rPr lang="en-US"/>
+              <a:t>13</a:t>
             </a:fld>
             <a:endParaRPr lang="en-US"/>
           </a:p>
@@ -3218,7 +3303,88 @@
       </p:sp>
       <p:sp>
         <p:nvSpPr>
-          <p:cNvPr id="10" name="Shape 8"/>
+          <p:cNvPr id="10" name="Text 8"/>
+          <p:cNvSpPr/>
+          <p:nvPr/>
+        </p:nvSpPr>
+        <p:spPr>
+          <a:xfrm>
+            <a:off x="457200" y="3547956"/>
+            <a:ext cx="1097280" cy="256032"/>
+          </a:xfrm>
+          <a:prstGeom prst="rect">
+            <a:avLst/>
+          </a:prstGeom>
+          <a:noFill/>
+          <a:ln/>
+        </p:spPr>
+        <p:txBody>
+          <a:bodyPr wrap="square" lIns="0" tIns="0" rIns="0" bIns="0" rtlCol="0" anchor="ctr"/>
+          <a:lstStyle/>
+          <a:p>
+            <a:pPr marL="0" indent="0">
+              <a:buNone/>
+            </a:pPr>
+            <a:r>
+              <a:rPr lang="en-US" sz="1100" b="1" dirty="0">
+                <a:solidFill>
+                  <a:srgbClr val="D6E4F0"/>
+                </a:solidFill>
+              </a:rPr>
+              <a:t>Live Demo:</a:t>
+            </a:r>
+            <a:endParaRPr lang="en-US" sz="1100" dirty="0"/>
+          </a:p>
+        </p:txBody>
+      </p:sp>
+      <p:sp>
+        <p:nvSpPr>
+          <p:cNvPr id="11" name="Text 9">
+            <a:hlinkClick r:id="rId3"/>
+          </p:cNvPr>
+          <p:cNvSpPr/>
+          <p:nvPr/>
+        </p:nvSpPr>
+        <p:spPr>
+          <a:xfrm>
+            <a:off x="1554480" y="3506724"/>
+            <a:ext cx="6583680" cy="256032"/>
+          </a:xfrm>
+          <a:prstGeom prst="rect">
+            <a:avLst/>
+          </a:prstGeom>
+          <a:noFill/>
+          <a:ln/>
+        </p:spPr>
+        <p:txBody>
+          <a:bodyPr wrap="square" lIns="0" tIns="0" rIns="0" bIns="0" rtlCol="0" anchor="ctr"/>
+          <a:lstStyle/>
+          <a:p>
+            <a:pPr marL="0" indent="0">
+              <a:buNone/>
+            </a:pPr>
+            <a:r>
+              <a:rPr lang="en-US" sz="1100" u="sng" dirty="0">
+                <a:solidFill>
+                  <a:srgbClr val="1F77B4"/>
+                </a:solidFill>
+                <a:hlinkClick r:id="rId3">
+                  <a:extLst>
+                    <a:ext uri="{A12FA001-AC4F-418D-AE19-62706E023703}">
+                      <ahyp:hlinkClr xmlns:ahyp="http://schemas.microsoft.com/office/drawing/2018/hyperlinkcolor" val="tx"/>
+                    </a:ext>
+                  </a:extLst>
+                </a:hlinkClick>
+              </a:rPr>
+              <a:t>https://finlens-app-360526413047.us-central1.run.app/</a:t>
+            </a:r>
+            <a:endParaRPr lang="en-US" sz="1100" dirty="0"/>
+          </a:p>
+        </p:txBody>
+      </p:sp>
+      <p:sp>
+        <p:nvSpPr>
+          <p:cNvPr id="12" name="Shape 10"/>
           <p:cNvSpPr/>
           <p:nvPr/>
         </p:nvSpPr>
@@ -3250,7 +3416,7 @@
       </p:sp>
       <p:sp>
         <p:nvSpPr>
-          <p:cNvPr id="11" name="Text 9"/>
+          <p:cNvPr id="13" name="Text 11"/>
           <p:cNvSpPr/>
           <p:nvPr/>
         </p:nvSpPr>
@@ -3286,7 +3452,7 @@
       </p:sp>
       <p:sp>
         <p:nvSpPr>
-          <p:cNvPr id="12" name="Shape 10"/>
+          <p:cNvPr id="14" name="Shape 12"/>
           <p:cNvSpPr/>
           <p:nvPr/>
         </p:nvSpPr>
@@ -3318,7 +3484,7 @@
       </p:sp>
       <p:sp>
         <p:nvSpPr>
-          <p:cNvPr id="13" name="Text 11"/>
+          <p:cNvPr id="15" name="Text 13"/>
           <p:cNvSpPr/>
           <p:nvPr/>
         </p:nvSpPr>
@@ -3354,7 +3520,7 @@
       </p:sp>
       <p:sp>
         <p:nvSpPr>
-          <p:cNvPr id="14" name="Shape 12"/>
+          <p:cNvPr id="16" name="Shape 14"/>
           <p:cNvSpPr/>
           <p:nvPr/>
         </p:nvSpPr>
@@ -3386,7 +3552,7 @@
       </p:sp>
       <p:sp>
         <p:nvSpPr>
-          <p:cNvPr id="15" name="Text 13"/>
+          <p:cNvPr id="17" name="Text 15"/>
           <p:cNvSpPr/>
           <p:nvPr/>
         </p:nvSpPr>
@@ -3422,7 +3588,7 @@
       </p:sp>
       <p:sp>
         <p:nvSpPr>
-          <p:cNvPr id="16" name="Shape 14"/>
+          <p:cNvPr id="18" name="Shape 16"/>
           <p:cNvSpPr/>
           <p:nvPr/>
         </p:nvSpPr>
@@ -3454,7 +3620,7 @@
       </p:sp>
       <p:sp>
         <p:nvSpPr>
-          <p:cNvPr id="17" name="Text 15"/>
+          <p:cNvPr id="19" name="Text 17"/>
           <p:cNvSpPr/>
           <p:nvPr/>
         </p:nvSpPr>
@@ -3490,7 +3656,7 @@
       </p:sp>
       <p:sp>
         <p:nvSpPr>
-          <p:cNvPr id="18" name="Shape 16"/>
+          <p:cNvPr id="20" name="Shape 18"/>
           <p:cNvSpPr/>
           <p:nvPr/>
         </p:nvSpPr>
@@ -3522,7 +3688,7 @@
       </p:sp>
       <p:sp>
         <p:nvSpPr>
-          <p:cNvPr id="19" name="Text 17"/>
+          <p:cNvPr id="21" name="Text 19"/>
           <p:cNvSpPr/>
           <p:nvPr/>
         </p:nvSpPr>
@@ -3558,7 +3724,7 @@
       </p:sp>
       <p:sp>
         <p:nvSpPr>
-          <p:cNvPr id="20" name="Shape 18"/>
+          <p:cNvPr id="22" name="Shape 20"/>
           <p:cNvSpPr/>
           <p:nvPr/>
         </p:nvSpPr>
@@ -3590,7 +3756,7 @@
       </p:sp>
       <p:sp>
         <p:nvSpPr>
-          <p:cNvPr id="21" name="Text 19"/>
+          <p:cNvPr id="23" name="Text 21"/>
           <p:cNvSpPr/>
           <p:nvPr/>
         </p:nvSpPr>
@@ -5636,7 +5802,7 @@
                   <a:srgbClr val="FFFFFF"/>
                 </a:solidFill>
               </a:rPr>
-              <a:t>Recommended Next Steps</a:t>
+              <a:t>Additional testing</a:t>
             </a:r>
             <a:endParaRPr lang="en-US" sz="1200" dirty="0"/>
           </a:p>
@@ -5672,7 +5838,7 @@
                   <a:srgbClr val="475569"/>
                 </a:solidFill>
               </a:rPr>
-              <a:t>Rerun with individual loan-level HMDA microdata (not aggregated). Add 2024–2025 HMDA vintages for VA/CO. Supplement with lender survey data on data-broker usage changes post-CCPA enactment.</a:t>
+              <a:t>Rerun with individual loan-level HMDA microdata (not aggregated). Test the impact of HDMA regulation on data-broker usage using lender survey data post-CCPA enactment.</a:t>
             </a:r>
             <a:endParaRPr lang="en-US" sz="1050" dirty="0"/>
           </a:p>
@@ -5862,7 +6028,7 @@
         <p:spPr>
           <a:xfrm>
             <a:off x="1371600" y="2487168"/>
-            <a:ext cx="6400800" cy="347472"/>
+            <a:ext cx="6400800" cy="310896"/>
           </a:xfrm>
           <a:prstGeom prst="rect">
             <a:avLst/>
@@ -5905,8 +6071,8 @@
         </p:nvSpPr>
         <p:spPr>
           <a:xfrm>
-            <a:off x="1371600" y="2889504"/>
-            <a:ext cx="6400800" cy="347472"/>
+            <a:off x="1371600" y="2834640"/>
+            <a:ext cx="6400800" cy="310896"/>
           </a:xfrm>
           <a:prstGeom prst="rect">
             <a:avLst/>
@@ -5949,8 +6115,8 @@
         </p:nvSpPr>
         <p:spPr>
           <a:xfrm>
-            <a:off x="1371600" y="3291840"/>
-            <a:ext cx="6400800" cy="347472"/>
+            <a:off x="1371600" y="3182112"/>
+            <a:ext cx="6400800" cy="310896"/>
           </a:xfrm>
           <a:prstGeom prst="rect">
             <a:avLst/>
@@ -5993,8 +6159,8 @@
         </p:nvSpPr>
         <p:spPr>
           <a:xfrm>
-            <a:off x="1371600" y="3694176"/>
-            <a:ext cx="6400800" cy="347472"/>
+            <a:off x="1371600" y="3529584"/>
+            <a:ext cx="6400800" cy="310896"/>
           </a:xfrm>
           <a:prstGeom prst="rect">
             <a:avLst/>
@@ -6032,6 +6198,50 @@
       <p:sp>
         <p:nvSpPr>
           <p:cNvPr id="10" name="Text 8"/>
+          <p:cNvSpPr/>
+          <p:nvPr/>
+        </p:nvSpPr>
+        <p:spPr>
+          <a:xfrm>
+            <a:off x="1371600" y="3877056"/>
+            <a:ext cx="6400800" cy="310896"/>
+          </a:xfrm>
+          <a:prstGeom prst="rect">
+            <a:avLst/>
+          </a:prstGeom>
+          <a:noFill/>
+          <a:ln/>
+        </p:spPr>
+        <p:txBody>
+          <a:bodyPr wrap="square" lIns="0" tIns="0" rIns="0" bIns="0" rtlCol="0" anchor="ctr"/>
+          <a:lstStyle/>
+          <a:p>
+            <a:pPr marL="0" indent="0" algn="ctr">
+              <a:buNone/>
+            </a:pPr>
+            <a:r>
+              <a:rPr lang="en-US" sz="1100" b="1" dirty="0">
+                <a:solidFill>
+                  <a:srgbClr val="D6E4F0"/>
+                </a:solidFill>
+              </a:rPr>
+              <a:t>Demo:  </a:t>
+            </a:r>
+            <a:r>
+              <a:rPr lang="en-US" sz="1100" u="sng" dirty="0">
+                <a:solidFill>
+                  <a:srgbClr val="1F77B4"/>
+                </a:solidFill>
+              </a:rPr>
+              <a:t>https://finlens-app-360526413047.us-central1.run.app/</a:t>
+            </a:r>
+            <a:endParaRPr lang="en-US" sz="1100" dirty="0"/>
+          </a:p>
+        </p:txBody>
+      </p:sp>
+      <p:sp>
+        <p:nvSpPr>
+          <p:cNvPr id="11" name="Text 9"/>
           <p:cNvSpPr/>
           <p:nvPr/>
         </p:nvSpPr>
@@ -6062,6 +6272,2131 @@
               <a:t>FinLens  ·  Privacy Law Impact Study  ·  HMDA 2018–2023  ·  Causal Inference</a:t>
             </a:r>
             <a:endParaRPr lang="en-US" sz="1000" dirty="0"/>
+          </a:p>
+        </p:txBody>
+      </p:sp>
+    </p:spTree>
+  </p:cSld>
+  <p:clrMapOvr>
+    <a:masterClrMapping/>
+  </p:clrMapOvr>
+</p:sld>
+</file>
+
+<file path=ppt/slides/slide13.xml><?xml version="1.0" encoding="utf-8"?>
+<p:sld xmlns:a="http://schemas.openxmlformats.org/drawingml/2006/main" xmlns:r="http://schemas.openxmlformats.org/officeDocument/2006/relationships" xmlns:p="http://schemas.openxmlformats.org/presentationml/2006/main">
+  <p:cSld name="Slide 14">
+    <p:bg>
+      <p:bgPr>
+        <a:solidFill>
+          <a:srgbClr val="F7F9FC"/>
+        </a:solidFill>
+        <a:effectLst/>
+      </p:bgPr>
+    </p:bg>
+    <p:spTree>
+      <p:nvGrpSpPr>
+        <p:cNvPr id="1" name=""/>
+        <p:cNvGrpSpPr/>
+        <p:nvPr/>
+      </p:nvGrpSpPr>
+      <p:grpSpPr>
+        <a:xfrm>
+          <a:off x="0" y="0"/>
+          <a:ext cx="0" cy="0"/>
+          <a:chOff x="0" y="0"/>
+          <a:chExt cx="0" cy="0"/>
+        </a:xfrm>
+      </p:grpSpPr>
+      <p:sp>
+        <p:nvSpPr>
+          <p:cNvPr id="2" name="Shape 0"/>
+          <p:cNvSpPr/>
+          <p:nvPr/>
+        </p:nvSpPr>
+        <p:spPr>
+          <a:xfrm>
+            <a:off x="0" y="0"/>
+            <a:ext cx="9144000" cy="658368"/>
+          </a:xfrm>
+          <a:prstGeom prst="rect">
+            <a:avLst/>
+          </a:prstGeom>
+          <a:solidFill>
+            <a:srgbClr val="1A3A6B"/>
+          </a:solidFill>
+          <a:ln w="12700">
+            <a:solidFill>
+              <a:srgbClr val="1A3A6B"/>
+            </a:solidFill>
+            <a:prstDash val="solid"/>
+          </a:ln>
+        </p:spPr>
+        <p:txBody>
+          <a:bodyPr/>
+          <a:lstStyle/>
+          <a:p>
+            <a:endParaRPr lang="en-US"/>
+          </a:p>
+        </p:txBody>
+      </p:sp>
+      <p:sp>
+        <p:nvSpPr>
+          <p:cNvPr id="3" name="Text 1"/>
+          <p:cNvSpPr/>
+          <p:nvPr/>
+        </p:nvSpPr>
+        <p:spPr>
+          <a:xfrm>
+            <a:off x="365760" y="0"/>
+            <a:ext cx="8412480" cy="658368"/>
+          </a:xfrm>
+          <a:prstGeom prst="rect">
+            <a:avLst/>
+          </a:prstGeom>
+          <a:noFill/>
+          <a:ln/>
+        </p:spPr>
+        <p:txBody>
+          <a:bodyPr wrap="square" lIns="0" tIns="0" rIns="0" bIns="0" rtlCol="0" anchor="ctr"/>
+          <a:lstStyle/>
+          <a:p>
+            <a:pPr marL="0" indent="0">
+              <a:buNone/>
+            </a:pPr>
+            <a:r>
+              <a:rPr lang="en-US" sz="2000" b="1" dirty="0">
+                <a:solidFill>
+                  <a:srgbClr val="FFFFFF"/>
+                </a:solidFill>
+              </a:rPr>
+              <a:t>Deployment Architecture — Google Cloud + Streamlit</a:t>
+            </a:r>
+            <a:endParaRPr lang="en-US" sz="2000" dirty="0"/>
+          </a:p>
+        </p:txBody>
+      </p:sp>
+      <p:sp>
+        <p:nvSpPr>
+          <p:cNvPr id="4" name="Text 2"/>
+          <p:cNvSpPr/>
+          <p:nvPr/>
+        </p:nvSpPr>
+        <p:spPr>
+          <a:xfrm>
+            <a:off x="365760" y="749808"/>
+            <a:ext cx="8412480" cy="256032"/>
+          </a:xfrm>
+          <a:prstGeom prst="rect">
+            <a:avLst/>
+          </a:prstGeom>
+          <a:noFill/>
+          <a:ln/>
+        </p:spPr>
+        <p:txBody>
+          <a:bodyPr wrap="square" lIns="0" tIns="0" rIns="0" bIns="0" rtlCol="0" anchor="ctr"/>
+          <a:lstStyle/>
+          <a:p>
+            <a:pPr marL="0" indent="0">
+              <a:buNone/>
+            </a:pPr>
+            <a:r>
+              <a:rPr lang="en-US" sz="1050" i="1" dirty="0">
+                <a:solidFill>
+                  <a:srgbClr val="64748B"/>
+                </a:solidFill>
+              </a:rPr>
+              <a:t>Production-grade pipeline: ingestion → transformation → analytics app, fully hosted on GCP</a:t>
+            </a:r>
+            <a:endParaRPr lang="en-US" sz="1050" dirty="0"/>
+          </a:p>
+        </p:txBody>
+      </p:sp>
+      <p:sp>
+        <p:nvSpPr>
+          <p:cNvPr id="5" name="Shape 3"/>
+          <p:cNvSpPr/>
+          <p:nvPr/>
+        </p:nvSpPr>
+        <p:spPr>
+          <a:xfrm>
+            <a:off x="274320" y="1097280"/>
+            <a:ext cx="1600200" cy="2103120"/>
+          </a:xfrm>
+          <a:prstGeom prst="rect">
+            <a:avLst/>
+          </a:prstGeom>
+          <a:solidFill>
+            <a:srgbClr val="FFFFFF"/>
+          </a:solidFill>
+          <a:ln w="12700">
+            <a:solidFill>
+              <a:srgbClr val="E2E8F0"/>
+            </a:solidFill>
+            <a:prstDash val="solid"/>
+          </a:ln>
+          <a:effectLst>
+            <a:outerShdw blurRad="101600" dist="38100" dir="8100000" algn="bl" rotWithShape="0">
+              <a:srgbClr val="000000">
+                <a:alpha val="10000"/>
+              </a:srgbClr>
+            </a:outerShdw>
+          </a:effectLst>
+        </p:spPr>
+        <p:txBody>
+          <a:bodyPr/>
+          <a:lstStyle/>
+          <a:p>
+            <a:endParaRPr lang="en-US"/>
+          </a:p>
+        </p:txBody>
+      </p:sp>
+      <p:sp>
+        <p:nvSpPr>
+          <p:cNvPr id="6" name="Shape 4"/>
+          <p:cNvSpPr/>
+          <p:nvPr/>
+        </p:nvSpPr>
+        <p:spPr>
+          <a:xfrm>
+            <a:off x="274320" y="1097280"/>
+            <a:ext cx="1600200" cy="420624"/>
+          </a:xfrm>
+          <a:prstGeom prst="rect">
+            <a:avLst/>
+          </a:prstGeom>
+          <a:solidFill>
+            <a:srgbClr val="34568B"/>
+          </a:solidFill>
+          <a:ln w="12700">
+            <a:solidFill>
+              <a:srgbClr val="34568B"/>
+            </a:solidFill>
+            <a:prstDash val="solid"/>
+          </a:ln>
+        </p:spPr>
+        <p:txBody>
+          <a:bodyPr/>
+          <a:lstStyle/>
+          <a:p>
+            <a:endParaRPr lang="en-US"/>
+          </a:p>
+        </p:txBody>
+      </p:sp>
+      <p:sp>
+        <p:nvSpPr>
+          <p:cNvPr id="7" name="Text 5"/>
+          <p:cNvSpPr/>
+          <p:nvPr/>
+        </p:nvSpPr>
+        <p:spPr>
+          <a:xfrm>
+            <a:off x="347472" y="1097280"/>
+            <a:ext cx="1508760" cy="420624"/>
+          </a:xfrm>
+          <a:prstGeom prst="rect">
+            <a:avLst/>
+          </a:prstGeom>
+          <a:noFill/>
+          <a:ln/>
+        </p:spPr>
+        <p:txBody>
+          <a:bodyPr wrap="square" lIns="0" tIns="0" rIns="0" bIns="0" rtlCol="0" anchor="ctr"/>
+          <a:lstStyle/>
+          <a:p>
+            <a:pPr marL="0" indent="0" algn="ctr">
+              <a:buNone/>
+            </a:pPr>
+            <a:r>
+              <a:rPr lang="en-US" sz="950" b="1" dirty="0">
+                <a:solidFill>
+                  <a:srgbClr val="FFFFFF"/>
+                </a:solidFill>
+              </a:rPr>
+              <a:t>① Data Sources</a:t>
+            </a:r>
+            <a:endParaRPr lang="en-US" sz="950" dirty="0"/>
+          </a:p>
+        </p:txBody>
+      </p:sp>
+      <p:sp>
+        <p:nvSpPr>
+          <p:cNvPr id="8" name="Text 6"/>
+          <p:cNvSpPr/>
+          <p:nvPr/>
+        </p:nvSpPr>
+        <p:spPr>
+          <a:xfrm>
+            <a:off x="365760" y="1591056"/>
+            <a:ext cx="1417320" cy="402336"/>
+          </a:xfrm>
+          <a:prstGeom prst="rect">
+            <a:avLst/>
+          </a:prstGeom>
+          <a:noFill/>
+          <a:ln/>
+        </p:spPr>
+        <p:txBody>
+          <a:bodyPr wrap="square" lIns="0" tIns="0" rIns="0" bIns="0" rtlCol="0" anchor="ctr"/>
+          <a:lstStyle/>
+          <a:p>
+            <a:pPr marL="0" indent="0" algn="ctr">
+              <a:buNone/>
+            </a:pPr>
+            <a:r>
+              <a:rPr lang="en-US" sz="1000" dirty="0">
+                <a:solidFill>
+                  <a:srgbClr val="475569"/>
+                </a:solidFill>
+              </a:rPr>
+              <a:t>CFPB HMDA API</a:t>
+            </a:r>
+            <a:endParaRPr lang="en-US" sz="1000" dirty="0"/>
+          </a:p>
+        </p:txBody>
+      </p:sp>
+      <p:sp>
+        <p:nvSpPr>
+          <p:cNvPr id="9" name="Text 7"/>
+          <p:cNvSpPr/>
+          <p:nvPr/>
+        </p:nvSpPr>
+        <p:spPr>
+          <a:xfrm>
+            <a:off x="365760" y="2029968"/>
+            <a:ext cx="1417320" cy="402336"/>
+          </a:xfrm>
+          <a:prstGeom prst="rect">
+            <a:avLst/>
+          </a:prstGeom>
+          <a:noFill/>
+          <a:ln/>
+        </p:spPr>
+        <p:txBody>
+          <a:bodyPr wrap="square" lIns="0" tIns="0" rIns="0" bIns="0" rtlCol="0" anchor="ctr"/>
+          <a:lstStyle/>
+          <a:p>
+            <a:pPr marL="0" indent="0" algn="ctr">
+              <a:buNone/>
+            </a:pPr>
+            <a:r>
+              <a:rPr lang="en-US" sz="1000" dirty="0">
+                <a:solidFill>
+                  <a:srgbClr val="475569"/>
+                </a:solidFill>
+              </a:rPr>
+              <a:t>FRED Macro API</a:t>
+            </a:r>
+            <a:endParaRPr lang="en-US" sz="1000" dirty="0"/>
+          </a:p>
+        </p:txBody>
+      </p:sp>
+      <p:sp>
+        <p:nvSpPr>
+          <p:cNvPr id="10" name="Shape 8"/>
+          <p:cNvSpPr/>
+          <p:nvPr/>
+        </p:nvSpPr>
+        <p:spPr>
+          <a:xfrm>
+            <a:off x="1892808" y="2066544"/>
+            <a:ext cx="155448" cy="256032"/>
+          </a:xfrm>
+          <a:prstGeom prst="rect">
+            <a:avLst/>
+          </a:prstGeom>
+          <a:solidFill>
+            <a:srgbClr val="9DAFC0"/>
+          </a:solidFill>
+          <a:ln w="12700">
+            <a:solidFill>
+              <a:srgbClr val="9DAFC0"/>
+            </a:solidFill>
+            <a:prstDash val="solid"/>
+          </a:ln>
+        </p:spPr>
+        <p:txBody>
+          <a:bodyPr/>
+          <a:lstStyle/>
+          <a:p>
+            <a:endParaRPr lang="en-US"/>
+          </a:p>
+        </p:txBody>
+      </p:sp>
+      <p:sp>
+        <p:nvSpPr>
+          <p:cNvPr id="11" name="Shape 9"/>
+          <p:cNvSpPr/>
+          <p:nvPr/>
+        </p:nvSpPr>
+        <p:spPr>
+          <a:xfrm>
+            <a:off x="2057400" y="1097280"/>
+            <a:ext cx="1600200" cy="2103120"/>
+          </a:xfrm>
+          <a:prstGeom prst="rect">
+            <a:avLst/>
+          </a:prstGeom>
+          <a:solidFill>
+            <a:srgbClr val="FFFFFF"/>
+          </a:solidFill>
+          <a:ln w="12700">
+            <a:solidFill>
+              <a:srgbClr val="E2E8F0"/>
+            </a:solidFill>
+            <a:prstDash val="solid"/>
+          </a:ln>
+          <a:effectLst>
+            <a:outerShdw blurRad="101600" dist="38100" dir="8100000" algn="bl" rotWithShape="0">
+              <a:srgbClr val="000000">
+                <a:alpha val="10000"/>
+              </a:srgbClr>
+            </a:outerShdw>
+          </a:effectLst>
+        </p:spPr>
+        <p:txBody>
+          <a:bodyPr/>
+          <a:lstStyle/>
+          <a:p>
+            <a:endParaRPr lang="en-US"/>
+          </a:p>
+        </p:txBody>
+      </p:sp>
+      <p:sp>
+        <p:nvSpPr>
+          <p:cNvPr id="12" name="Shape 10"/>
+          <p:cNvSpPr/>
+          <p:nvPr/>
+        </p:nvSpPr>
+        <p:spPr>
+          <a:xfrm>
+            <a:off x="2057400" y="1097280"/>
+            <a:ext cx="1600200" cy="420624"/>
+          </a:xfrm>
+          <a:prstGeom prst="rect">
+            <a:avLst/>
+          </a:prstGeom>
+          <a:solidFill>
+            <a:srgbClr val="0D6EAF"/>
+          </a:solidFill>
+          <a:ln w="12700">
+            <a:solidFill>
+              <a:srgbClr val="0D6EAF"/>
+            </a:solidFill>
+            <a:prstDash val="solid"/>
+          </a:ln>
+        </p:spPr>
+        <p:txBody>
+          <a:bodyPr/>
+          <a:lstStyle/>
+          <a:p>
+            <a:endParaRPr lang="en-US"/>
+          </a:p>
+        </p:txBody>
+      </p:sp>
+      <p:sp>
+        <p:nvSpPr>
+          <p:cNvPr id="13" name="Text 11"/>
+          <p:cNvSpPr/>
+          <p:nvPr/>
+        </p:nvSpPr>
+        <p:spPr>
+          <a:xfrm>
+            <a:off x="2130552" y="1097280"/>
+            <a:ext cx="1508760" cy="420624"/>
+          </a:xfrm>
+          <a:prstGeom prst="rect">
+            <a:avLst/>
+          </a:prstGeom>
+          <a:noFill/>
+          <a:ln/>
+        </p:spPr>
+        <p:txBody>
+          <a:bodyPr wrap="square" lIns="0" tIns="0" rIns="0" bIns="0" rtlCol="0" anchor="ctr"/>
+          <a:lstStyle/>
+          <a:p>
+            <a:pPr marL="0" indent="0" algn="ctr">
+              <a:buNone/>
+            </a:pPr>
+            <a:r>
+              <a:rPr lang="en-US" sz="950" b="1" dirty="0">
+                <a:solidFill>
+                  <a:srgbClr val="FFFFFF"/>
+                </a:solidFill>
+              </a:rPr>
+              <a:t>② Ingestion</a:t>
+            </a:r>
+            <a:endParaRPr lang="en-US" sz="950" dirty="0"/>
+          </a:p>
+        </p:txBody>
+      </p:sp>
+      <p:sp>
+        <p:nvSpPr>
+          <p:cNvPr id="14" name="Text 12"/>
+          <p:cNvSpPr/>
+          <p:nvPr/>
+        </p:nvSpPr>
+        <p:spPr>
+          <a:xfrm>
+            <a:off x="2148840" y="1591056"/>
+            <a:ext cx="1417320" cy="402336"/>
+          </a:xfrm>
+          <a:prstGeom prst="rect">
+            <a:avLst/>
+          </a:prstGeom>
+          <a:noFill/>
+          <a:ln/>
+        </p:spPr>
+        <p:txBody>
+          <a:bodyPr wrap="square" lIns="0" tIns="0" rIns="0" bIns="0" rtlCol="0" anchor="ctr"/>
+          <a:lstStyle/>
+          <a:p>
+            <a:pPr marL="0" indent="0" algn="ctr">
+              <a:buNone/>
+            </a:pPr>
+            <a:r>
+              <a:rPr lang="en-US" sz="1000" dirty="0">
+                <a:solidFill>
+                  <a:srgbClr val="475569"/>
+                </a:solidFill>
+              </a:rPr>
+              <a:t>Cloud Composer</a:t>
+            </a:r>
+            <a:endParaRPr lang="en-US" sz="1000" dirty="0"/>
+          </a:p>
+        </p:txBody>
+      </p:sp>
+      <p:sp>
+        <p:nvSpPr>
+          <p:cNvPr id="15" name="Text 13"/>
+          <p:cNvSpPr/>
+          <p:nvPr/>
+        </p:nvSpPr>
+        <p:spPr>
+          <a:xfrm>
+            <a:off x="2148840" y="2029968"/>
+            <a:ext cx="1417320" cy="402336"/>
+          </a:xfrm>
+          <a:prstGeom prst="rect">
+            <a:avLst/>
+          </a:prstGeom>
+          <a:noFill/>
+          <a:ln/>
+        </p:spPr>
+        <p:txBody>
+          <a:bodyPr wrap="square" lIns="0" tIns="0" rIns="0" bIns="0" rtlCol="0" anchor="ctr"/>
+          <a:lstStyle/>
+          <a:p>
+            <a:pPr marL="0" indent="0" algn="ctr">
+              <a:buNone/>
+            </a:pPr>
+            <a:r>
+              <a:rPr lang="en-US" sz="1000" dirty="0">
+                <a:solidFill>
+                  <a:srgbClr val="475569"/>
+                </a:solidFill>
+              </a:rPr>
+              <a:t>(Airflow DAGs)</a:t>
+            </a:r>
+            <a:endParaRPr lang="en-US" sz="1000" dirty="0"/>
+          </a:p>
+        </p:txBody>
+      </p:sp>
+      <p:sp>
+        <p:nvSpPr>
+          <p:cNvPr id="16" name="Text 14"/>
+          <p:cNvSpPr/>
+          <p:nvPr/>
+        </p:nvSpPr>
+        <p:spPr>
+          <a:xfrm>
+            <a:off x="2148840" y="2468880"/>
+            <a:ext cx="1417320" cy="402336"/>
+          </a:xfrm>
+          <a:prstGeom prst="rect">
+            <a:avLst/>
+          </a:prstGeom>
+          <a:noFill/>
+          <a:ln/>
+        </p:spPr>
+        <p:txBody>
+          <a:bodyPr wrap="square" lIns="0" tIns="0" rIns="0" bIns="0" rtlCol="0" anchor="ctr"/>
+          <a:lstStyle/>
+          <a:p>
+            <a:pPr marL="0" indent="0" algn="ctr">
+              <a:buNone/>
+            </a:pPr>
+            <a:r>
+              <a:rPr lang="en-US" sz="1000" dirty="0">
+                <a:solidFill>
+                  <a:srgbClr val="475569"/>
+                </a:solidFill>
+              </a:rPr>
+              <a:t>Cloud Scheduler</a:t>
+            </a:r>
+            <a:endParaRPr lang="en-US" sz="1000" dirty="0"/>
+          </a:p>
+        </p:txBody>
+      </p:sp>
+      <p:sp>
+        <p:nvSpPr>
+          <p:cNvPr id="17" name="Shape 15"/>
+          <p:cNvSpPr/>
+          <p:nvPr/>
+        </p:nvSpPr>
+        <p:spPr>
+          <a:xfrm>
+            <a:off x="3675888" y="2066544"/>
+            <a:ext cx="155448" cy="256032"/>
+          </a:xfrm>
+          <a:prstGeom prst="rect">
+            <a:avLst/>
+          </a:prstGeom>
+          <a:solidFill>
+            <a:srgbClr val="9DAFC0"/>
+          </a:solidFill>
+          <a:ln w="12700">
+            <a:solidFill>
+              <a:srgbClr val="9DAFC0"/>
+            </a:solidFill>
+            <a:prstDash val="solid"/>
+          </a:ln>
+        </p:spPr>
+        <p:txBody>
+          <a:bodyPr/>
+          <a:lstStyle/>
+          <a:p>
+            <a:endParaRPr lang="en-US"/>
+          </a:p>
+        </p:txBody>
+      </p:sp>
+      <p:sp>
+        <p:nvSpPr>
+          <p:cNvPr id="18" name="Shape 16"/>
+          <p:cNvSpPr/>
+          <p:nvPr/>
+        </p:nvSpPr>
+        <p:spPr>
+          <a:xfrm>
+            <a:off x="3840480" y="1097280"/>
+            <a:ext cx="1600200" cy="2103120"/>
+          </a:xfrm>
+          <a:prstGeom prst="rect">
+            <a:avLst/>
+          </a:prstGeom>
+          <a:solidFill>
+            <a:srgbClr val="FFFFFF"/>
+          </a:solidFill>
+          <a:ln w="12700">
+            <a:solidFill>
+              <a:srgbClr val="E2E8F0"/>
+            </a:solidFill>
+            <a:prstDash val="solid"/>
+          </a:ln>
+          <a:effectLst>
+            <a:outerShdw blurRad="101600" dist="38100" dir="8100000" algn="bl" rotWithShape="0">
+              <a:srgbClr val="000000">
+                <a:alpha val="10000"/>
+              </a:srgbClr>
+            </a:outerShdw>
+          </a:effectLst>
+        </p:spPr>
+        <p:txBody>
+          <a:bodyPr/>
+          <a:lstStyle/>
+          <a:p>
+            <a:endParaRPr lang="en-US"/>
+          </a:p>
+        </p:txBody>
+      </p:sp>
+      <p:sp>
+        <p:nvSpPr>
+          <p:cNvPr id="19" name="Shape 17"/>
+          <p:cNvSpPr/>
+          <p:nvPr/>
+        </p:nvSpPr>
+        <p:spPr>
+          <a:xfrm>
+            <a:off x="3840480" y="1097280"/>
+            <a:ext cx="1600200" cy="420624"/>
+          </a:xfrm>
+          <a:prstGeom prst="rect">
+            <a:avLst/>
+          </a:prstGeom>
+          <a:solidFill>
+            <a:srgbClr val="1F77B4"/>
+          </a:solidFill>
+          <a:ln w="12700">
+            <a:solidFill>
+              <a:srgbClr val="1F77B4"/>
+            </a:solidFill>
+            <a:prstDash val="solid"/>
+          </a:ln>
+        </p:spPr>
+        <p:txBody>
+          <a:bodyPr/>
+          <a:lstStyle/>
+          <a:p>
+            <a:endParaRPr lang="en-US"/>
+          </a:p>
+        </p:txBody>
+      </p:sp>
+      <p:sp>
+        <p:nvSpPr>
+          <p:cNvPr id="20" name="Text 18"/>
+          <p:cNvSpPr/>
+          <p:nvPr/>
+        </p:nvSpPr>
+        <p:spPr>
+          <a:xfrm>
+            <a:off x="3913632" y="1097280"/>
+            <a:ext cx="1508760" cy="420624"/>
+          </a:xfrm>
+          <a:prstGeom prst="rect">
+            <a:avLst/>
+          </a:prstGeom>
+          <a:noFill/>
+          <a:ln/>
+        </p:spPr>
+        <p:txBody>
+          <a:bodyPr wrap="square" lIns="0" tIns="0" rIns="0" bIns="0" rtlCol="0" anchor="ctr"/>
+          <a:lstStyle/>
+          <a:p>
+            <a:pPr marL="0" indent="0" algn="ctr">
+              <a:buNone/>
+            </a:pPr>
+            <a:r>
+              <a:rPr lang="en-US" sz="950" b="1" dirty="0">
+                <a:solidFill>
+                  <a:srgbClr val="FFFFFF"/>
+                </a:solidFill>
+              </a:rPr>
+              <a:t>③ Storage</a:t>
+            </a:r>
+            <a:endParaRPr lang="en-US" sz="950" dirty="0"/>
+          </a:p>
+        </p:txBody>
+      </p:sp>
+      <p:sp>
+        <p:nvSpPr>
+          <p:cNvPr id="21" name="Text 19"/>
+          <p:cNvSpPr/>
+          <p:nvPr/>
+        </p:nvSpPr>
+        <p:spPr>
+          <a:xfrm>
+            <a:off x="3931920" y="1591056"/>
+            <a:ext cx="1417320" cy="402336"/>
+          </a:xfrm>
+          <a:prstGeom prst="rect">
+            <a:avLst/>
+          </a:prstGeom>
+          <a:noFill/>
+          <a:ln/>
+        </p:spPr>
+        <p:txBody>
+          <a:bodyPr wrap="square" lIns="0" tIns="0" rIns="0" bIns="0" rtlCol="0" anchor="ctr"/>
+          <a:lstStyle/>
+          <a:p>
+            <a:pPr marL="0" indent="0" algn="ctr">
+              <a:buNone/>
+            </a:pPr>
+            <a:r>
+              <a:rPr lang="en-US" sz="1000" dirty="0">
+                <a:solidFill>
+                  <a:srgbClr val="475569"/>
+                </a:solidFill>
+              </a:rPr>
+              <a:t>BigQuery</a:t>
+            </a:r>
+            <a:endParaRPr lang="en-US" sz="1000" dirty="0"/>
+          </a:p>
+        </p:txBody>
+      </p:sp>
+      <p:sp>
+        <p:nvSpPr>
+          <p:cNvPr id="22" name="Text 20"/>
+          <p:cNvSpPr/>
+          <p:nvPr/>
+        </p:nvSpPr>
+        <p:spPr>
+          <a:xfrm>
+            <a:off x="3931920" y="2029968"/>
+            <a:ext cx="1417320" cy="402336"/>
+          </a:xfrm>
+          <a:prstGeom prst="rect">
+            <a:avLst/>
+          </a:prstGeom>
+          <a:noFill/>
+          <a:ln/>
+        </p:spPr>
+        <p:txBody>
+          <a:bodyPr wrap="square" lIns="0" tIns="0" rIns="0" bIns="0" rtlCol="0" anchor="ctr"/>
+          <a:lstStyle/>
+          <a:p>
+            <a:pPr marL="0" indent="0" algn="ctr">
+              <a:buNone/>
+            </a:pPr>
+            <a:r>
+              <a:rPr lang="en-US" sz="1000" dirty="0">
+                <a:solidFill>
+                  <a:srgbClr val="475569"/>
+                </a:solidFill>
+              </a:rPr>
+              <a:t>Raw + Staging</a:t>
+            </a:r>
+            <a:endParaRPr lang="en-US" sz="1000" dirty="0"/>
+          </a:p>
+        </p:txBody>
+      </p:sp>
+      <p:sp>
+        <p:nvSpPr>
+          <p:cNvPr id="23" name="Text 21"/>
+          <p:cNvSpPr/>
+          <p:nvPr/>
+        </p:nvSpPr>
+        <p:spPr>
+          <a:xfrm>
+            <a:off x="3931920" y="2468880"/>
+            <a:ext cx="1417320" cy="402336"/>
+          </a:xfrm>
+          <a:prstGeom prst="rect">
+            <a:avLst/>
+          </a:prstGeom>
+          <a:noFill/>
+          <a:ln/>
+        </p:spPr>
+        <p:txBody>
+          <a:bodyPr wrap="square" lIns="0" tIns="0" rIns="0" bIns="0" rtlCol="0" anchor="ctr"/>
+          <a:lstStyle/>
+          <a:p>
+            <a:pPr marL="0" indent="0" algn="ctr">
+              <a:buNone/>
+            </a:pPr>
+            <a:r>
+              <a:rPr lang="en-US" sz="1000" dirty="0">
+                <a:solidFill>
+                  <a:srgbClr val="475569"/>
+                </a:solidFill>
+              </a:rPr>
+              <a:t>Datasets</a:t>
+            </a:r>
+            <a:endParaRPr lang="en-US" sz="1000" dirty="0"/>
+          </a:p>
+        </p:txBody>
+      </p:sp>
+      <p:sp>
+        <p:nvSpPr>
+          <p:cNvPr id="24" name="Shape 22"/>
+          <p:cNvSpPr/>
+          <p:nvPr/>
+        </p:nvSpPr>
+        <p:spPr>
+          <a:xfrm>
+            <a:off x="5458968" y="2066544"/>
+            <a:ext cx="155448" cy="256032"/>
+          </a:xfrm>
+          <a:prstGeom prst="rect">
+            <a:avLst/>
+          </a:prstGeom>
+          <a:solidFill>
+            <a:srgbClr val="9DAFC0"/>
+          </a:solidFill>
+          <a:ln w="12700">
+            <a:solidFill>
+              <a:srgbClr val="9DAFC0"/>
+            </a:solidFill>
+            <a:prstDash val="solid"/>
+          </a:ln>
+        </p:spPr>
+        <p:txBody>
+          <a:bodyPr/>
+          <a:lstStyle/>
+          <a:p>
+            <a:endParaRPr lang="en-US"/>
+          </a:p>
+        </p:txBody>
+      </p:sp>
+      <p:sp>
+        <p:nvSpPr>
+          <p:cNvPr id="25" name="Shape 23"/>
+          <p:cNvSpPr/>
+          <p:nvPr/>
+        </p:nvSpPr>
+        <p:spPr>
+          <a:xfrm>
+            <a:off x="5623560" y="1097280"/>
+            <a:ext cx="1600200" cy="2103120"/>
+          </a:xfrm>
+          <a:prstGeom prst="rect">
+            <a:avLst/>
+          </a:prstGeom>
+          <a:solidFill>
+            <a:srgbClr val="FFFFFF"/>
+          </a:solidFill>
+          <a:ln w="12700">
+            <a:solidFill>
+              <a:srgbClr val="E2E8F0"/>
+            </a:solidFill>
+            <a:prstDash val="solid"/>
+          </a:ln>
+          <a:effectLst>
+            <a:outerShdw blurRad="101600" dist="38100" dir="8100000" algn="bl" rotWithShape="0">
+              <a:srgbClr val="000000">
+                <a:alpha val="10000"/>
+              </a:srgbClr>
+            </a:outerShdw>
+          </a:effectLst>
+        </p:spPr>
+        <p:txBody>
+          <a:bodyPr/>
+          <a:lstStyle/>
+          <a:p>
+            <a:endParaRPr lang="en-US"/>
+          </a:p>
+        </p:txBody>
+      </p:sp>
+      <p:sp>
+        <p:nvSpPr>
+          <p:cNvPr id="26" name="Shape 24"/>
+          <p:cNvSpPr/>
+          <p:nvPr/>
+        </p:nvSpPr>
+        <p:spPr>
+          <a:xfrm>
+            <a:off x="5623560" y="1097280"/>
+            <a:ext cx="1600200" cy="420624"/>
+          </a:xfrm>
+          <a:prstGeom prst="rect">
+            <a:avLst/>
+          </a:prstGeom>
+          <a:solidFill>
+            <a:srgbClr val="128B6F"/>
+          </a:solidFill>
+          <a:ln w="12700">
+            <a:solidFill>
+              <a:srgbClr val="128B6F"/>
+            </a:solidFill>
+            <a:prstDash val="solid"/>
+          </a:ln>
+        </p:spPr>
+        <p:txBody>
+          <a:bodyPr/>
+          <a:lstStyle/>
+          <a:p>
+            <a:endParaRPr lang="en-US"/>
+          </a:p>
+        </p:txBody>
+      </p:sp>
+      <p:sp>
+        <p:nvSpPr>
+          <p:cNvPr id="27" name="Text 25"/>
+          <p:cNvSpPr/>
+          <p:nvPr/>
+        </p:nvSpPr>
+        <p:spPr>
+          <a:xfrm>
+            <a:off x="5696712" y="1097280"/>
+            <a:ext cx="1508760" cy="420624"/>
+          </a:xfrm>
+          <a:prstGeom prst="rect">
+            <a:avLst/>
+          </a:prstGeom>
+          <a:noFill/>
+          <a:ln/>
+        </p:spPr>
+        <p:txBody>
+          <a:bodyPr wrap="square" lIns="0" tIns="0" rIns="0" bIns="0" rtlCol="0" anchor="ctr"/>
+          <a:lstStyle/>
+          <a:p>
+            <a:pPr marL="0" indent="0" algn="ctr">
+              <a:buNone/>
+            </a:pPr>
+            <a:r>
+              <a:rPr lang="en-US" sz="950" b="1" dirty="0">
+                <a:solidFill>
+                  <a:srgbClr val="FFFFFF"/>
+                </a:solidFill>
+              </a:rPr>
+              <a:t>④ Transform</a:t>
+            </a:r>
+            <a:endParaRPr lang="en-US" sz="950" dirty="0"/>
+          </a:p>
+        </p:txBody>
+      </p:sp>
+      <p:sp>
+        <p:nvSpPr>
+          <p:cNvPr id="28" name="Text 26"/>
+          <p:cNvSpPr/>
+          <p:nvPr/>
+        </p:nvSpPr>
+        <p:spPr>
+          <a:xfrm>
+            <a:off x="5715000" y="1591056"/>
+            <a:ext cx="1417320" cy="402336"/>
+          </a:xfrm>
+          <a:prstGeom prst="rect">
+            <a:avLst/>
+          </a:prstGeom>
+          <a:noFill/>
+          <a:ln/>
+        </p:spPr>
+        <p:txBody>
+          <a:bodyPr wrap="square" lIns="0" tIns="0" rIns="0" bIns="0" rtlCol="0" anchor="ctr"/>
+          <a:lstStyle/>
+          <a:p>
+            <a:pPr marL="0" indent="0" algn="ctr">
+              <a:buNone/>
+            </a:pPr>
+            <a:r>
+              <a:rPr lang="en-US" sz="1000" dirty="0">
+                <a:solidFill>
+                  <a:srgbClr val="475569"/>
+                </a:solidFill>
+              </a:rPr>
+              <a:t>dbt Core</a:t>
+            </a:r>
+            <a:endParaRPr lang="en-US" sz="1000" dirty="0"/>
+          </a:p>
+        </p:txBody>
+      </p:sp>
+      <p:sp>
+        <p:nvSpPr>
+          <p:cNvPr id="29" name="Text 27"/>
+          <p:cNvSpPr/>
+          <p:nvPr/>
+        </p:nvSpPr>
+        <p:spPr>
+          <a:xfrm>
+            <a:off x="5715000" y="2029968"/>
+            <a:ext cx="1417320" cy="402336"/>
+          </a:xfrm>
+          <a:prstGeom prst="rect">
+            <a:avLst/>
+          </a:prstGeom>
+          <a:noFill/>
+          <a:ln/>
+        </p:spPr>
+        <p:txBody>
+          <a:bodyPr wrap="square" lIns="0" tIns="0" rIns="0" bIns="0" rtlCol="0" anchor="ctr"/>
+          <a:lstStyle/>
+          <a:p>
+            <a:pPr marL="0" indent="0" algn="ctr">
+              <a:buNone/>
+            </a:pPr>
+            <a:r>
+              <a:rPr lang="en-US" sz="1000" dirty="0">
+                <a:solidFill>
+                  <a:srgbClr val="475569"/>
+                </a:solidFill>
+              </a:rPr>
+              <a:t>Staging → Marts</a:t>
+            </a:r>
+            <a:endParaRPr lang="en-US" sz="1000" dirty="0"/>
+          </a:p>
+        </p:txBody>
+      </p:sp>
+      <p:sp>
+        <p:nvSpPr>
+          <p:cNvPr id="30" name="Text 28"/>
+          <p:cNvSpPr/>
+          <p:nvPr/>
+        </p:nvSpPr>
+        <p:spPr>
+          <a:xfrm>
+            <a:off x="5715000" y="2468880"/>
+            <a:ext cx="1417320" cy="402336"/>
+          </a:xfrm>
+          <a:prstGeom prst="rect">
+            <a:avLst/>
+          </a:prstGeom>
+          <a:noFill/>
+          <a:ln/>
+        </p:spPr>
+        <p:txBody>
+          <a:bodyPr wrap="square" lIns="0" tIns="0" rIns="0" bIns="0" rtlCol="0" anchor="ctr"/>
+          <a:lstStyle/>
+          <a:p>
+            <a:pPr marL="0" indent="0" algn="ctr">
+              <a:buNone/>
+            </a:pPr>
+            <a:r>
+              <a:rPr lang="en-US" sz="1000" dirty="0">
+                <a:solidFill>
+                  <a:srgbClr val="475569"/>
+                </a:solidFill>
+              </a:rPr>
+              <a:t>Data quality tests</a:t>
+            </a:r>
+            <a:endParaRPr lang="en-US" sz="1000" dirty="0"/>
+          </a:p>
+        </p:txBody>
+      </p:sp>
+      <p:sp>
+        <p:nvSpPr>
+          <p:cNvPr id="31" name="Shape 29"/>
+          <p:cNvSpPr/>
+          <p:nvPr/>
+        </p:nvSpPr>
+        <p:spPr>
+          <a:xfrm>
+            <a:off x="7242048" y="2066544"/>
+            <a:ext cx="155448" cy="256032"/>
+          </a:xfrm>
+          <a:prstGeom prst="rect">
+            <a:avLst/>
+          </a:prstGeom>
+          <a:solidFill>
+            <a:srgbClr val="9DAFC0"/>
+          </a:solidFill>
+          <a:ln w="12700">
+            <a:solidFill>
+              <a:srgbClr val="9DAFC0"/>
+            </a:solidFill>
+            <a:prstDash val="solid"/>
+          </a:ln>
+        </p:spPr>
+        <p:txBody>
+          <a:bodyPr/>
+          <a:lstStyle/>
+          <a:p>
+            <a:endParaRPr lang="en-US"/>
+          </a:p>
+        </p:txBody>
+      </p:sp>
+      <p:sp>
+        <p:nvSpPr>
+          <p:cNvPr id="32" name="Shape 30"/>
+          <p:cNvSpPr/>
+          <p:nvPr/>
+        </p:nvSpPr>
+        <p:spPr>
+          <a:xfrm>
+            <a:off x="7406640" y="1097280"/>
+            <a:ext cx="1463040" cy="2103120"/>
+          </a:xfrm>
+          <a:prstGeom prst="rect">
+            <a:avLst/>
+          </a:prstGeom>
+          <a:solidFill>
+            <a:srgbClr val="FFFFFF"/>
+          </a:solidFill>
+          <a:ln w="12700">
+            <a:solidFill>
+              <a:srgbClr val="E2E8F0"/>
+            </a:solidFill>
+            <a:prstDash val="solid"/>
+          </a:ln>
+          <a:effectLst>
+            <a:outerShdw blurRad="101600" dist="38100" dir="8100000" algn="bl" rotWithShape="0">
+              <a:srgbClr val="000000">
+                <a:alpha val="10000"/>
+              </a:srgbClr>
+            </a:outerShdw>
+          </a:effectLst>
+        </p:spPr>
+        <p:txBody>
+          <a:bodyPr/>
+          <a:lstStyle/>
+          <a:p>
+            <a:endParaRPr lang="en-US"/>
+          </a:p>
+        </p:txBody>
+      </p:sp>
+      <p:sp>
+        <p:nvSpPr>
+          <p:cNvPr id="33" name="Shape 31"/>
+          <p:cNvSpPr/>
+          <p:nvPr/>
+        </p:nvSpPr>
+        <p:spPr>
+          <a:xfrm>
+            <a:off x="7406640" y="1097280"/>
+            <a:ext cx="1463040" cy="420624"/>
+          </a:xfrm>
+          <a:prstGeom prst="rect">
+            <a:avLst/>
+          </a:prstGeom>
+          <a:solidFill>
+            <a:srgbClr val="2CA02C"/>
+          </a:solidFill>
+          <a:ln w="12700">
+            <a:solidFill>
+              <a:srgbClr val="2CA02C"/>
+            </a:solidFill>
+            <a:prstDash val="solid"/>
+          </a:ln>
+        </p:spPr>
+        <p:txBody>
+          <a:bodyPr/>
+          <a:lstStyle/>
+          <a:p>
+            <a:endParaRPr lang="en-US"/>
+          </a:p>
+        </p:txBody>
+      </p:sp>
+      <p:sp>
+        <p:nvSpPr>
+          <p:cNvPr id="34" name="Text 32"/>
+          <p:cNvSpPr/>
+          <p:nvPr/>
+        </p:nvSpPr>
+        <p:spPr>
+          <a:xfrm>
+            <a:off x="7479792" y="1097280"/>
+            <a:ext cx="1371600" cy="420624"/>
+          </a:xfrm>
+          <a:prstGeom prst="rect">
+            <a:avLst/>
+          </a:prstGeom>
+          <a:noFill/>
+          <a:ln/>
+        </p:spPr>
+        <p:txBody>
+          <a:bodyPr wrap="square" lIns="0" tIns="0" rIns="0" bIns="0" rtlCol="0" anchor="ctr"/>
+          <a:lstStyle/>
+          <a:p>
+            <a:pPr marL="0" indent="0" algn="ctr">
+              <a:buNone/>
+            </a:pPr>
+            <a:r>
+              <a:rPr lang="en-US" sz="950" b="1" dirty="0">
+                <a:solidFill>
+                  <a:srgbClr val="FFFFFF"/>
+                </a:solidFill>
+              </a:rPr>
+              <a:t>⑤ Serve</a:t>
+            </a:r>
+            <a:endParaRPr lang="en-US" sz="950" dirty="0"/>
+          </a:p>
+        </p:txBody>
+      </p:sp>
+      <p:sp>
+        <p:nvSpPr>
+          <p:cNvPr id="35" name="Text 33"/>
+          <p:cNvSpPr/>
+          <p:nvPr/>
+        </p:nvSpPr>
+        <p:spPr>
+          <a:xfrm>
+            <a:off x="7498080" y="1591056"/>
+            <a:ext cx="1280160" cy="402336"/>
+          </a:xfrm>
+          <a:prstGeom prst="rect">
+            <a:avLst/>
+          </a:prstGeom>
+          <a:noFill/>
+          <a:ln/>
+        </p:spPr>
+        <p:txBody>
+          <a:bodyPr wrap="square" lIns="0" tIns="0" rIns="0" bIns="0" rtlCol="0" anchor="ctr"/>
+          <a:lstStyle/>
+          <a:p>
+            <a:pPr marL="0" indent="0" algn="ctr">
+              <a:buNone/>
+            </a:pPr>
+            <a:r>
+              <a:rPr lang="en-US" sz="1000" dirty="0">
+                <a:solidFill>
+                  <a:srgbClr val="475569"/>
+                </a:solidFill>
+              </a:rPr>
+              <a:t>Cloud Run</a:t>
+            </a:r>
+            <a:endParaRPr lang="en-US" sz="1000" dirty="0"/>
+          </a:p>
+        </p:txBody>
+      </p:sp>
+      <p:sp>
+        <p:nvSpPr>
+          <p:cNvPr id="36" name="Text 34"/>
+          <p:cNvSpPr/>
+          <p:nvPr/>
+        </p:nvSpPr>
+        <p:spPr>
+          <a:xfrm>
+            <a:off x="7498080" y="2029968"/>
+            <a:ext cx="1280160" cy="402336"/>
+          </a:xfrm>
+          <a:prstGeom prst="rect">
+            <a:avLst/>
+          </a:prstGeom>
+          <a:noFill/>
+          <a:ln/>
+        </p:spPr>
+        <p:txBody>
+          <a:bodyPr wrap="square" lIns="0" tIns="0" rIns="0" bIns="0" rtlCol="0" anchor="ctr"/>
+          <a:lstStyle/>
+          <a:p>
+            <a:pPr marL="0" indent="0" algn="ctr">
+              <a:buNone/>
+            </a:pPr>
+            <a:r>
+              <a:rPr lang="en-US" sz="1000" dirty="0">
+                <a:solidFill>
+                  <a:srgbClr val="475569"/>
+                </a:solidFill>
+              </a:rPr>
+              <a:t>Streamlit App</a:t>
+            </a:r>
+            <a:endParaRPr lang="en-US" sz="1000" dirty="0"/>
+          </a:p>
+        </p:txBody>
+      </p:sp>
+      <p:sp>
+        <p:nvSpPr>
+          <p:cNvPr id="37" name="Text 35"/>
+          <p:cNvSpPr/>
+          <p:nvPr/>
+        </p:nvSpPr>
+        <p:spPr>
+          <a:xfrm>
+            <a:off x="7498080" y="2468880"/>
+            <a:ext cx="1280160" cy="402336"/>
+          </a:xfrm>
+          <a:prstGeom prst="rect">
+            <a:avLst/>
+          </a:prstGeom>
+          <a:noFill/>
+          <a:ln/>
+        </p:spPr>
+        <p:txBody>
+          <a:bodyPr wrap="square" lIns="0" tIns="0" rIns="0" bIns="0" rtlCol="0" anchor="ctr"/>
+          <a:lstStyle/>
+          <a:p>
+            <a:pPr marL="0" indent="0" algn="ctr">
+              <a:buNone/>
+            </a:pPr>
+            <a:r>
+              <a:rPr lang="en-US" sz="1000" dirty="0">
+                <a:solidFill>
+                  <a:srgbClr val="475569"/>
+                </a:solidFill>
+              </a:rPr>
+              <a:t>HTTPS endpoint</a:t>
+            </a:r>
+            <a:endParaRPr lang="en-US" sz="1000" dirty="0"/>
+          </a:p>
+        </p:txBody>
+      </p:sp>
+      <p:sp>
+        <p:nvSpPr>
+          <p:cNvPr id="38" name="Text 36"/>
+          <p:cNvSpPr/>
+          <p:nvPr/>
+        </p:nvSpPr>
+        <p:spPr>
+          <a:xfrm>
+            <a:off x="274320" y="3364992"/>
+            <a:ext cx="5029200" cy="274320"/>
+          </a:xfrm>
+          <a:prstGeom prst="rect">
+            <a:avLst/>
+          </a:prstGeom>
+          <a:noFill/>
+          <a:ln/>
+        </p:spPr>
+        <p:txBody>
+          <a:bodyPr wrap="square" lIns="0" tIns="0" rIns="0" bIns="0" rtlCol="0" anchor="ctr"/>
+          <a:lstStyle/>
+          <a:p>
+            <a:pPr marL="0" indent="0">
+              <a:buNone/>
+            </a:pPr>
+            <a:r>
+              <a:rPr lang="en-US" sz="1200" b="1" dirty="0">
+                <a:solidFill>
+                  <a:srgbClr val="1A3A6B"/>
+                </a:solidFill>
+              </a:rPr>
+              <a:t>GCP Services used in this deployment</a:t>
+            </a:r>
+            <a:endParaRPr lang="en-US" sz="1200" dirty="0"/>
+          </a:p>
+        </p:txBody>
+      </p:sp>
+      <p:sp>
+        <p:nvSpPr>
+          <p:cNvPr id="39" name="Shape 37"/>
+          <p:cNvSpPr/>
+          <p:nvPr/>
+        </p:nvSpPr>
+        <p:spPr>
+          <a:xfrm>
+            <a:off x="274320" y="3657600"/>
+            <a:ext cx="1627632" cy="914400"/>
+          </a:xfrm>
+          <a:prstGeom prst="rect">
+            <a:avLst/>
+          </a:prstGeom>
+          <a:solidFill>
+            <a:srgbClr val="FFFFFF"/>
+          </a:solidFill>
+          <a:ln w="12700">
+            <a:solidFill>
+              <a:srgbClr val="E2E8F0"/>
+            </a:solidFill>
+            <a:prstDash val="solid"/>
+          </a:ln>
+          <a:effectLst>
+            <a:outerShdw blurRad="101600" dist="38100" dir="8100000" algn="bl" rotWithShape="0">
+              <a:srgbClr val="000000">
+                <a:alpha val="10000"/>
+              </a:srgbClr>
+            </a:outerShdw>
+          </a:effectLst>
+        </p:spPr>
+        <p:txBody>
+          <a:bodyPr/>
+          <a:lstStyle/>
+          <a:p>
+            <a:endParaRPr lang="en-US"/>
+          </a:p>
+        </p:txBody>
+      </p:sp>
+      <p:sp>
+        <p:nvSpPr>
+          <p:cNvPr id="40" name="Shape 38"/>
+          <p:cNvSpPr/>
+          <p:nvPr/>
+        </p:nvSpPr>
+        <p:spPr>
+          <a:xfrm>
+            <a:off x="274320" y="3657600"/>
+            <a:ext cx="1627632" cy="54864"/>
+          </a:xfrm>
+          <a:prstGeom prst="rect">
+            <a:avLst/>
+          </a:prstGeom>
+          <a:solidFill>
+            <a:srgbClr val="1F77B4"/>
+          </a:solidFill>
+          <a:ln w="12700">
+            <a:solidFill>
+              <a:srgbClr val="1F77B4"/>
+            </a:solidFill>
+            <a:prstDash val="solid"/>
+          </a:ln>
+        </p:spPr>
+        <p:txBody>
+          <a:bodyPr/>
+          <a:lstStyle/>
+          <a:p>
+            <a:endParaRPr lang="en-US"/>
+          </a:p>
+        </p:txBody>
+      </p:sp>
+      <p:sp>
+        <p:nvSpPr>
+          <p:cNvPr id="41" name="Text 39"/>
+          <p:cNvSpPr/>
+          <p:nvPr/>
+        </p:nvSpPr>
+        <p:spPr>
+          <a:xfrm>
+            <a:off x="365760" y="3730752"/>
+            <a:ext cx="1444752" cy="274320"/>
+          </a:xfrm>
+          <a:prstGeom prst="rect">
+            <a:avLst/>
+          </a:prstGeom>
+          <a:noFill/>
+          <a:ln/>
+        </p:spPr>
+        <p:txBody>
+          <a:bodyPr wrap="square" lIns="0" tIns="0" rIns="0" bIns="0" rtlCol="0" anchor="ctr"/>
+          <a:lstStyle/>
+          <a:p>
+            <a:pPr marL="0" indent="0">
+              <a:buNone/>
+            </a:pPr>
+            <a:r>
+              <a:rPr lang="en-US" sz="1000" b="1" dirty="0">
+                <a:solidFill>
+                  <a:srgbClr val="1A3A6B"/>
+                </a:solidFill>
+              </a:rPr>
+              <a:t>BigQuery</a:t>
+            </a:r>
+            <a:endParaRPr lang="en-US" sz="1000" dirty="0"/>
+          </a:p>
+        </p:txBody>
+      </p:sp>
+      <p:sp>
+        <p:nvSpPr>
+          <p:cNvPr id="42" name="Text 40"/>
+          <p:cNvSpPr/>
+          <p:nvPr/>
+        </p:nvSpPr>
+        <p:spPr>
+          <a:xfrm>
+            <a:off x="365760" y="4023360"/>
+            <a:ext cx="1444752" cy="512064"/>
+          </a:xfrm>
+          <a:prstGeom prst="rect">
+            <a:avLst/>
+          </a:prstGeom>
+          <a:noFill/>
+          <a:ln/>
+        </p:spPr>
+        <p:txBody>
+          <a:bodyPr wrap="square" lIns="0" tIns="0" rIns="0" bIns="0" rtlCol="0" anchor="ctr"/>
+          <a:lstStyle/>
+          <a:p>
+            <a:pPr marL="0" indent="0">
+              <a:buNone/>
+            </a:pPr>
+            <a:r>
+              <a:rPr lang="en-US" sz="900" dirty="0">
+                <a:solidFill>
+                  <a:srgbClr val="475569"/>
+                </a:solidFill>
+              </a:rPr>
+              <a:t>Petabyte-scale analytical</a:t>
+            </a:r>
+            <a:endParaRPr lang="en-US" sz="900" dirty="0"/>
+          </a:p>
+          <a:p>
+            <a:pPr marL="0" indent="0">
+              <a:buNone/>
+            </a:pPr>
+            <a:r>
+              <a:rPr lang="en-US" sz="900" dirty="0">
+                <a:solidFill>
+                  <a:srgbClr val="475569"/>
+                </a:solidFill>
+              </a:rPr>
+              <a:t>data warehouse</a:t>
+            </a:r>
+            <a:endParaRPr lang="en-US" sz="900" dirty="0"/>
+          </a:p>
+        </p:txBody>
+      </p:sp>
+      <p:sp>
+        <p:nvSpPr>
+          <p:cNvPr id="43" name="Shape 41"/>
+          <p:cNvSpPr/>
+          <p:nvPr/>
+        </p:nvSpPr>
+        <p:spPr>
+          <a:xfrm>
+            <a:off x="2029968" y="3657600"/>
+            <a:ext cx="1627632" cy="914400"/>
+          </a:xfrm>
+          <a:prstGeom prst="rect">
+            <a:avLst/>
+          </a:prstGeom>
+          <a:solidFill>
+            <a:srgbClr val="FFFFFF"/>
+          </a:solidFill>
+          <a:ln w="12700">
+            <a:solidFill>
+              <a:srgbClr val="E2E8F0"/>
+            </a:solidFill>
+            <a:prstDash val="solid"/>
+          </a:ln>
+          <a:effectLst>
+            <a:outerShdw blurRad="101600" dist="38100" dir="8100000" algn="bl" rotWithShape="0">
+              <a:srgbClr val="000000">
+                <a:alpha val="10000"/>
+              </a:srgbClr>
+            </a:outerShdw>
+          </a:effectLst>
+        </p:spPr>
+        <p:txBody>
+          <a:bodyPr/>
+          <a:lstStyle/>
+          <a:p>
+            <a:endParaRPr lang="en-US"/>
+          </a:p>
+        </p:txBody>
+      </p:sp>
+      <p:sp>
+        <p:nvSpPr>
+          <p:cNvPr id="44" name="Shape 42"/>
+          <p:cNvSpPr/>
+          <p:nvPr/>
+        </p:nvSpPr>
+        <p:spPr>
+          <a:xfrm>
+            <a:off x="2029968" y="3657600"/>
+            <a:ext cx="1627632" cy="54864"/>
+          </a:xfrm>
+          <a:prstGeom prst="rect">
+            <a:avLst/>
+          </a:prstGeom>
+          <a:solidFill>
+            <a:srgbClr val="1F77B4"/>
+          </a:solidFill>
+          <a:ln w="12700">
+            <a:solidFill>
+              <a:srgbClr val="1F77B4"/>
+            </a:solidFill>
+            <a:prstDash val="solid"/>
+          </a:ln>
+        </p:spPr>
+        <p:txBody>
+          <a:bodyPr/>
+          <a:lstStyle/>
+          <a:p>
+            <a:endParaRPr lang="en-US"/>
+          </a:p>
+        </p:txBody>
+      </p:sp>
+      <p:sp>
+        <p:nvSpPr>
+          <p:cNvPr id="45" name="Text 43"/>
+          <p:cNvSpPr/>
+          <p:nvPr/>
+        </p:nvSpPr>
+        <p:spPr>
+          <a:xfrm>
+            <a:off x="2121408" y="3730752"/>
+            <a:ext cx="1444752" cy="274320"/>
+          </a:xfrm>
+          <a:prstGeom prst="rect">
+            <a:avLst/>
+          </a:prstGeom>
+          <a:noFill/>
+          <a:ln/>
+        </p:spPr>
+        <p:txBody>
+          <a:bodyPr wrap="square" lIns="0" tIns="0" rIns="0" bIns="0" rtlCol="0" anchor="ctr"/>
+          <a:lstStyle/>
+          <a:p>
+            <a:pPr marL="0" indent="0">
+              <a:buNone/>
+            </a:pPr>
+            <a:r>
+              <a:rPr lang="en-US" sz="1000" b="1" dirty="0">
+                <a:solidFill>
+                  <a:srgbClr val="1A3A6B"/>
+                </a:solidFill>
+              </a:rPr>
+              <a:t>Cloud Composer</a:t>
+            </a:r>
+            <a:endParaRPr lang="en-US" sz="1000" dirty="0"/>
+          </a:p>
+        </p:txBody>
+      </p:sp>
+      <p:sp>
+        <p:nvSpPr>
+          <p:cNvPr id="46" name="Text 44"/>
+          <p:cNvSpPr/>
+          <p:nvPr/>
+        </p:nvSpPr>
+        <p:spPr>
+          <a:xfrm>
+            <a:off x="2121408" y="4023360"/>
+            <a:ext cx="1444752" cy="512064"/>
+          </a:xfrm>
+          <a:prstGeom prst="rect">
+            <a:avLst/>
+          </a:prstGeom>
+          <a:noFill/>
+          <a:ln/>
+        </p:spPr>
+        <p:txBody>
+          <a:bodyPr wrap="square" lIns="0" tIns="0" rIns="0" bIns="0" rtlCol="0" anchor="ctr"/>
+          <a:lstStyle/>
+          <a:p>
+            <a:pPr marL="0" indent="0">
+              <a:buNone/>
+            </a:pPr>
+            <a:r>
+              <a:rPr lang="en-US" sz="900" dirty="0">
+                <a:solidFill>
+                  <a:srgbClr val="475569"/>
+                </a:solidFill>
+              </a:rPr>
+              <a:t>Managed Apache Airflow</a:t>
+            </a:r>
+            <a:endParaRPr lang="en-US" sz="900" dirty="0"/>
+          </a:p>
+          <a:p>
+            <a:pPr marL="0" indent="0">
+              <a:buNone/>
+            </a:pPr>
+            <a:r>
+              <a:rPr lang="en-US" sz="900" dirty="0">
+                <a:solidFill>
+                  <a:srgbClr val="475569"/>
+                </a:solidFill>
+              </a:rPr>
+              <a:t>for pipeline orchestration</a:t>
+            </a:r>
+            <a:endParaRPr lang="en-US" sz="900" dirty="0"/>
+          </a:p>
+        </p:txBody>
+      </p:sp>
+      <p:sp>
+        <p:nvSpPr>
+          <p:cNvPr id="47" name="Shape 45"/>
+          <p:cNvSpPr/>
+          <p:nvPr/>
+        </p:nvSpPr>
+        <p:spPr>
+          <a:xfrm>
+            <a:off x="3785616" y="3657600"/>
+            <a:ext cx="1627632" cy="914400"/>
+          </a:xfrm>
+          <a:prstGeom prst="rect">
+            <a:avLst/>
+          </a:prstGeom>
+          <a:solidFill>
+            <a:srgbClr val="FFFFFF"/>
+          </a:solidFill>
+          <a:ln w="12700">
+            <a:solidFill>
+              <a:srgbClr val="E2E8F0"/>
+            </a:solidFill>
+            <a:prstDash val="solid"/>
+          </a:ln>
+          <a:effectLst>
+            <a:outerShdw blurRad="101600" dist="38100" dir="8100000" algn="bl" rotWithShape="0">
+              <a:srgbClr val="000000">
+                <a:alpha val="10000"/>
+              </a:srgbClr>
+            </a:outerShdw>
+          </a:effectLst>
+        </p:spPr>
+        <p:txBody>
+          <a:bodyPr/>
+          <a:lstStyle/>
+          <a:p>
+            <a:endParaRPr lang="en-US"/>
+          </a:p>
+        </p:txBody>
+      </p:sp>
+      <p:sp>
+        <p:nvSpPr>
+          <p:cNvPr id="48" name="Shape 46"/>
+          <p:cNvSpPr/>
+          <p:nvPr/>
+        </p:nvSpPr>
+        <p:spPr>
+          <a:xfrm>
+            <a:off x="3785616" y="3657600"/>
+            <a:ext cx="1627632" cy="54864"/>
+          </a:xfrm>
+          <a:prstGeom prst="rect">
+            <a:avLst/>
+          </a:prstGeom>
+          <a:solidFill>
+            <a:srgbClr val="1F77B4"/>
+          </a:solidFill>
+          <a:ln w="12700">
+            <a:solidFill>
+              <a:srgbClr val="1F77B4"/>
+            </a:solidFill>
+            <a:prstDash val="solid"/>
+          </a:ln>
+        </p:spPr>
+        <p:txBody>
+          <a:bodyPr/>
+          <a:lstStyle/>
+          <a:p>
+            <a:endParaRPr lang="en-US"/>
+          </a:p>
+        </p:txBody>
+      </p:sp>
+      <p:sp>
+        <p:nvSpPr>
+          <p:cNvPr id="49" name="Text 47"/>
+          <p:cNvSpPr/>
+          <p:nvPr/>
+        </p:nvSpPr>
+        <p:spPr>
+          <a:xfrm>
+            <a:off x="3877056" y="3730752"/>
+            <a:ext cx="1444752" cy="274320"/>
+          </a:xfrm>
+          <a:prstGeom prst="rect">
+            <a:avLst/>
+          </a:prstGeom>
+          <a:noFill/>
+          <a:ln/>
+        </p:spPr>
+        <p:txBody>
+          <a:bodyPr wrap="square" lIns="0" tIns="0" rIns="0" bIns="0" rtlCol="0" anchor="ctr"/>
+          <a:lstStyle/>
+          <a:p>
+            <a:pPr marL="0" indent="0">
+              <a:buNone/>
+            </a:pPr>
+            <a:r>
+              <a:rPr lang="en-US" sz="1000" b="1" dirty="0">
+                <a:solidFill>
+                  <a:srgbClr val="1A3A6B"/>
+                </a:solidFill>
+              </a:rPr>
+              <a:t>Cloud Run</a:t>
+            </a:r>
+            <a:endParaRPr lang="en-US" sz="1000" dirty="0"/>
+          </a:p>
+        </p:txBody>
+      </p:sp>
+      <p:sp>
+        <p:nvSpPr>
+          <p:cNvPr id="50" name="Text 48"/>
+          <p:cNvSpPr/>
+          <p:nvPr/>
+        </p:nvSpPr>
+        <p:spPr>
+          <a:xfrm>
+            <a:off x="3877056" y="4023360"/>
+            <a:ext cx="1444752" cy="512064"/>
+          </a:xfrm>
+          <a:prstGeom prst="rect">
+            <a:avLst/>
+          </a:prstGeom>
+          <a:noFill/>
+          <a:ln/>
+        </p:spPr>
+        <p:txBody>
+          <a:bodyPr wrap="square" lIns="0" tIns="0" rIns="0" bIns="0" rtlCol="0" anchor="ctr"/>
+          <a:lstStyle/>
+          <a:p>
+            <a:pPr marL="0" indent="0">
+              <a:buNone/>
+            </a:pPr>
+            <a:r>
+              <a:rPr lang="en-US" sz="900" dirty="0">
+                <a:solidFill>
+                  <a:srgbClr val="475569"/>
+                </a:solidFill>
+              </a:rPr>
+              <a:t>Serverless containers</a:t>
+            </a:r>
+            <a:endParaRPr lang="en-US" sz="900" dirty="0"/>
+          </a:p>
+          <a:p>
+            <a:pPr marL="0" indent="0">
+              <a:buNone/>
+            </a:pPr>
+            <a:r>
+              <a:rPr lang="en-US" sz="900" dirty="0">
+                <a:solidFill>
+                  <a:srgbClr val="475569"/>
+                </a:solidFill>
+              </a:rPr>
+              <a:t>for Streamlit app</a:t>
+            </a:r>
+            <a:endParaRPr lang="en-US" sz="900" dirty="0"/>
+          </a:p>
+        </p:txBody>
+      </p:sp>
+      <p:sp>
+        <p:nvSpPr>
+          <p:cNvPr id="51" name="Shape 49"/>
+          <p:cNvSpPr/>
+          <p:nvPr/>
+        </p:nvSpPr>
+        <p:spPr>
+          <a:xfrm>
+            <a:off x="5541264" y="3657600"/>
+            <a:ext cx="1627632" cy="914400"/>
+          </a:xfrm>
+          <a:prstGeom prst="rect">
+            <a:avLst/>
+          </a:prstGeom>
+          <a:solidFill>
+            <a:srgbClr val="FFFFFF"/>
+          </a:solidFill>
+          <a:ln w="12700">
+            <a:solidFill>
+              <a:srgbClr val="E2E8F0"/>
+            </a:solidFill>
+            <a:prstDash val="solid"/>
+          </a:ln>
+          <a:effectLst>
+            <a:outerShdw blurRad="101600" dist="38100" dir="8100000" algn="bl" rotWithShape="0">
+              <a:srgbClr val="000000">
+                <a:alpha val="10000"/>
+              </a:srgbClr>
+            </a:outerShdw>
+          </a:effectLst>
+        </p:spPr>
+        <p:txBody>
+          <a:bodyPr/>
+          <a:lstStyle/>
+          <a:p>
+            <a:endParaRPr lang="en-US"/>
+          </a:p>
+        </p:txBody>
+      </p:sp>
+      <p:sp>
+        <p:nvSpPr>
+          <p:cNvPr id="52" name="Shape 50"/>
+          <p:cNvSpPr/>
+          <p:nvPr/>
+        </p:nvSpPr>
+        <p:spPr>
+          <a:xfrm>
+            <a:off x="5541264" y="3657600"/>
+            <a:ext cx="1627632" cy="54864"/>
+          </a:xfrm>
+          <a:prstGeom prst="rect">
+            <a:avLst/>
+          </a:prstGeom>
+          <a:solidFill>
+            <a:srgbClr val="1F77B4"/>
+          </a:solidFill>
+          <a:ln w="12700">
+            <a:solidFill>
+              <a:srgbClr val="1F77B4"/>
+            </a:solidFill>
+            <a:prstDash val="solid"/>
+          </a:ln>
+        </p:spPr>
+        <p:txBody>
+          <a:bodyPr/>
+          <a:lstStyle/>
+          <a:p>
+            <a:endParaRPr lang="en-US"/>
+          </a:p>
+        </p:txBody>
+      </p:sp>
+      <p:sp>
+        <p:nvSpPr>
+          <p:cNvPr id="53" name="Text 51"/>
+          <p:cNvSpPr/>
+          <p:nvPr/>
+        </p:nvSpPr>
+        <p:spPr>
+          <a:xfrm>
+            <a:off x="5632704" y="3730752"/>
+            <a:ext cx="1444752" cy="274320"/>
+          </a:xfrm>
+          <a:prstGeom prst="rect">
+            <a:avLst/>
+          </a:prstGeom>
+          <a:noFill/>
+          <a:ln/>
+        </p:spPr>
+        <p:txBody>
+          <a:bodyPr wrap="square" lIns="0" tIns="0" rIns="0" bIns="0" rtlCol="0" anchor="ctr"/>
+          <a:lstStyle/>
+          <a:p>
+            <a:pPr marL="0" indent="0">
+              <a:buNone/>
+            </a:pPr>
+            <a:r>
+              <a:rPr lang="en-US" sz="1000" b="1" dirty="0">
+                <a:solidFill>
+                  <a:srgbClr val="1A3A6B"/>
+                </a:solidFill>
+              </a:rPr>
+              <a:t>Artifact Registry</a:t>
+            </a:r>
+            <a:endParaRPr lang="en-US" sz="1000" dirty="0"/>
+          </a:p>
+        </p:txBody>
+      </p:sp>
+      <p:sp>
+        <p:nvSpPr>
+          <p:cNvPr id="54" name="Text 52"/>
+          <p:cNvSpPr/>
+          <p:nvPr/>
+        </p:nvSpPr>
+        <p:spPr>
+          <a:xfrm>
+            <a:off x="5632704" y="4023360"/>
+            <a:ext cx="1444752" cy="512064"/>
+          </a:xfrm>
+          <a:prstGeom prst="rect">
+            <a:avLst/>
+          </a:prstGeom>
+          <a:noFill/>
+          <a:ln/>
+        </p:spPr>
+        <p:txBody>
+          <a:bodyPr wrap="square" lIns="0" tIns="0" rIns="0" bIns="0" rtlCol="0" anchor="ctr"/>
+          <a:lstStyle/>
+          <a:p>
+            <a:pPr marL="0" indent="0">
+              <a:buNone/>
+            </a:pPr>
+            <a:r>
+              <a:rPr lang="en-US" sz="900" dirty="0">
+                <a:solidFill>
+                  <a:srgbClr val="475569"/>
+                </a:solidFill>
+              </a:rPr>
+              <a:t>Docker image registry</a:t>
+            </a:r>
+            <a:endParaRPr lang="en-US" sz="900" dirty="0"/>
+          </a:p>
+          <a:p>
+            <a:pPr marL="0" indent="0">
+              <a:buNone/>
+            </a:pPr>
+            <a:r>
+              <a:rPr lang="en-US" sz="900" dirty="0">
+                <a:solidFill>
+                  <a:srgbClr val="475569"/>
+                </a:solidFill>
+              </a:rPr>
+              <a:t>for app containers</a:t>
+            </a:r>
+            <a:endParaRPr lang="en-US" sz="900" dirty="0"/>
+          </a:p>
+        </p:txBody>
+      </p:sp>
+      <p:sp>
+        <p:nvSpPr>
+          <p:cNvPr id="55" name="Shape 53"/>
+          <p:cNvSpPr/>
+          <p:nvPr/>
+        </p:nvSpPr>
+        <p:spPr>
+          <a:xfrm>
+            <a:off x="7296912" y="3657600"/>
+            <a:ext cx="1627632" cy="914400"/>
+          </a:xfrm>
+          <a:prstGeom prst="rect">
+            <a:avLst/>
+          </a:prstGeom>
+          <a:solidFill>
+            <a:srgbClr val="FFFFFF"/>
+          </a:solidFill>
+          <a:ln w="12700">
+            <a:solidFill>
+              <a:srgbClr val="E2E8F0"/>
+            </a:solidFill>
+            <a:prstDash val="solid"/>
+          </a:ln>
+          <a:effectLst>
+            <a:outerShdw blurRad="101600" dist="38100" dir="8100000" algn="bl" rotWithShape="0">
+              <a:srgbClr val="000000">
+                <a:alpha val="10000"/>
+              </a:srgbClr>
+            </a:outerShdw>
+          </a:effectLst>
+        </p:spPr>
+        <p:txBody>
+          <a:bodyPr/>
+          <a:lstStyle/>
+          <a:p>
+            <a:endParaRPr lang="en-US"/>
+          </a:p>
+        </p:txBody>
+      </p:sp>
+      <p:sp>
+        <p:nvSpPr>
+          <p:cNvPr id="56" name="Shape 54"/>
+          <p:cNvSpPr/>
+          <p:nvPr/>
+        </p:nvSpPr>
+        <p:spPr>
+          <a:xfrm>
+            <a:off x="7296912" y="3657600"/>
+            <a:ext cx="1627632" cy="54864"/>
+          </a:xfrm>
+          <a:prstGeom prst="rect">
+            <a:avLst/>
+          </a:prstGeom>
+          <a:solidFill>
+            <a:srgbClr val="1F77B4"/>
+          </a:solidFill>
+          <a:ln w="12700">
+            <a:solidFill>
+              <a:srgbClr val="1F77B4"/>
+            </a:solidFill>
+            <a:prstDash val="solid"/>
+          </a:ln>
+        </p:spPr>
+        <p:txBody>
+          <a:bodyPr/>
+          <a:lstStyle/>
+          <a:p>
+            <a:endParaRPr lang="en-US"/>
+          </a:p>
+        </p:txBody>
+      </p:sp>
+      <p:sp>
+        <p:nvSpPr>
+          <p:cNvPr id="57" name="Text 55"/>
+          <p:cNvSpPr/>
+          <p:nvPr/>
+        </p:nvSpPr>
+        <p:spPr>
+          <a:xfrm>
+            <a:off x="7388352" y="3730752"/>
+            <a:ext cx="1444752" cy="274320"/>
+          </a:xfrm>
+          <a:prstGeom prst="rect">
+            <a:avLst/>
+          </a:prstGeom>
+          <a:noFill/>
+          <a:ln/>
+        </p:spPr>
+        <p:txBody>
+          <a:bodyPr wrap="square" lIns="0" tIns="0" rIns="0" bIns="0" rtlCol="0" anchor="ctr"/>
+          <a:lstStyle/>
+          <a:p>
+            <a:pPr marL="0" indent="0">
+              <a:buNone/>
+            </a:pPr>
+            <a:r>
+              <a:rPr lang="en-US" sz="1000" b="1" dirty="0">
+                <a:solidFill>
+                  <a:srgbClr val="1A3A6B"/>
+                </a:solidFill>
+              </a:rPr>
+              <a:t>Secret Manager</a:t>
+            </a:r>
+            <a:endParaRPr lang="en-US" sz="1000" dirty="0"/>
+          </a:p>
+        </p:txBody>
+      </p:sp>
+      <p:sp>
+        <p:nvSpPr>
+          <p:cNvPr id="58" name="Text 56"/>
+          <p:cNvSpPr/>
+          <p:nvPr/>
+        </p:nvSpPr>
+        <p:spPr>
+          <a:xfrm>
+            <a:off x="7388352" y="4023360"/>
+            <a:ext cx="1444752" cy="512064"/>
+          </a:xfrm>
+          <a:prstGeom prst="rect">
+            <a:avLst/>
+          </a:prstGeom>
+          <a:noFill/>
+          <a:ln/>
+        </p:spPr>
+        <p:txBody>
+          <a:bodyPr wrap="square" lIns="0" tIns="0" rIns="0" bIns="0" rtlCol="0" anchor="ctr"/>
+          <a:lstStyle/>
+          <a:p>
+            <a:pPr marL="0" indent="0">
+              <a:buNone/>
+            </a:pPr>
+            <a:r>
+              <a:rPr lang="en-US" sz="900" dirty="0">
+                <a:solidFill>
+                  <a:srgbClr val="475569"/>
+                </a:solidFill>
+              </a:rPr>
+              <a:t>API keys &amp; service</a:t>
+            </a:r>
+            <a:endParaRPr lang="en-US" sz="900" dirty="0"/>
+          </a:p>
+          <a:p>
+            <a:pPr marL="0" indent="0">
+              <a:buNone/>
+            </a:pPr>
+            <a:r>
+              <a:rPr lang="en-US" sz="900" dirty="0">
+                <a:solidFill>
+                  <a:srgbClr val="475569"/>
+                </a:solidFill>
+              </a:rPr>
+              <a:t>account credentials</a:t>
+            </a:r>
+            <a:endParaRPr lang="en-US" sz="900" dirty="0"/>
           </a:p>
         </p:txBody>
       </p:sp>
@@ -6803,7 +9138,7 @@
         <p:spPr>
           <a:xfrm>
             <a:off x="3419856" y="3346704"/>
-            <a:ext cx="1316736" cy="457200"/>
+            <a:ext cx="1252812" cy="457200"/>
           </a:xfrm>
           <a:prstGeom prst="rect">
             <a:avLst/>
@@ -9562,7 +11897,7 @@
               </a:rPr>
               <a:t>Does CCPA reduce overall mortgage approval rates in California relative to control states (TX, FL, OH)?</a:t>
             </a:r>
-            <a:endParaRPr lang="en-US" sz="1050" b="1" dirty="0"/>
+            <a:endParaRPr lang="en-US" sz="1050" dirty="0"/>
           </a:p>
         </p:txBody>
       </p:sp>
@@ -10210,17 +12545,11 @@
         <p:nvGraphicFramePr>
           <p:cNvPr id="26" name="Chart 0"/>
           <p:cNvGraphicFramePr/>
-          <p:nvPr>
-            <p:extLst>
-              <p:ext uri="{D42A27DB-BD31-4B8C-83A1-F6EECF244321}">
-                <p14:modId xmlns:p14="http://schemas.microsoft.com/office/powerpoint/2010/main" val="942558860"/>
-              </p:ext>
-            </p:extLst>
-          </p:nvPr>
+          <p:nvPr/>
         </p:nvGraphicFramePr>
         <p:xfrm>
           <a:off x="365760" y="2505456"/>
-          <a:ext cx="5120640" cy="2157984"/>
+          <a:ext cx="5120640" cy="2331720"/>
         </p:xfrm>
         <a:graphic>
           <a:graphicData uri="http://schemas.openxmlformats.org/drawingml/2006/chart">
@@ -10273,14 +12602,14 @@
           <p:nvPr>
             <p:extLst>
               <p:ext uri="{D42A27DB-BD31-4B8C-83A1-F6EECF244321}">
-                <p14:modId xmlns:p14="http://schemas.microsoft.com/office/powerpoint/2010/main" val="1349625797"/>
+                <p14:modId xmlns:p14="http://schemas.microsoft.com/office/powerpoint/2010/main" val="985438903"/>
               </p:ext>
             </p:extLst>
           </p:nvPr>
         </p:nvGraphicFramePr>
         <p:xfrm>
-          <a:off x="5715000" y="2505456"/>
-          <a:ext cx="3108960" cy="2125980"/>
+          <a:off x="5715000" y="2400300"/>
+          <a:ext cx="3108960" cy="2331720"/>
         </p:xfrm>
         <a:graphic>
           <a:graphicData uri="http://schemas.openxmlformats.org/drawingml/2006/table">
@@ -10309,7 +12638,7 @@
                   </a:extLst>
                 </a:gridCol>
               </a:tblGrid>
-              <a:tr h="232438">
+              <a:tr h="259080">
                 <a:tc>
                   <a:txBody>
                     <a:bodyPr/>
@@ -10499,7 +12828,7 @@
                   </a:ext>
                 </a:extLst>
               </a:tr>
-              <a:tr h="232438">
+              <a:tr h="259080">
                 <a:tc>
                   <a:txBody>
                     <a:bodyPr/>
@@ -10689,7 +13018,7 @@
                   </a:ext>
                 </a:extLst>
               </a:tr>
-              <a:tr h="232438">
+              <a:tr h="259080">
                 <a:tc>
                   <a:txBody>
                     <a:bodyPr/>
@@ -10879,7 +13208,7 @@
                   </a:ext>
                 </a:extLst>
               </a:tr>
-              <a:tr h="232438">
+              <a:tr h="259080">
                 <a:tc>
                   <a:txBody>
                     <a:bodyPr/>
@@ -11069,7 +13398,7 @@
                   </a:ext>
                 </a:extLst>
               </a:tr>
-              <a:tr h="232438">
+              <a:tr h="259080">
                 <a:tc>
                   <a:txBody>
                     <a:bodyPr/>
@@ -11259,7 +13588,7 @@
                   </a:ext>
                 </a:extLst>
               </a:tr>
-              <a:tr h="232438">
+              <a:tr h="259080">
                 <a:tc>
                   <a:txBody>
                     <a:bodyPr/>
@@ -11449,7 +13778,7 @@
                   </a:ext>
                 </a:extLst>
               </a:tr>
-              <a:tr h="232438">
+              <a:tr h="259080">
                 <a:tc>
                   <a:txBody>
                     <a:bodyPr/>
@@ -11639,7 +13968,7 @@
                   </a:ext>
                 </a:extLst>
               </a:tr>
-              <a:tr h="232438">
+              <a:tr h="259080">
                 <a:tc>
                   <a:txBody>
                     <a:bodyPr/>
@@ -11829,7 +14158,7 @@
                   </a:ext>
                 </a:extLst>
               </a:tr>
-              <a:tr h="232438">
+              <a:tr h="259080">
                 <a:tc>
                   <a:txBody>
                     <a:bodyPr/>
@@ -12031,8 +14360,8 @@
         </p:nvSpPr>
         <p:spPr>
           <a:xfrm>
-            <a:off x="0" y="4663440"/>
-            <a:ext cx="9144000" cy="480060"/>
+            <a:off x="0" y="4773336"/>
+            <a:ext cx="9144000" cy="370164"/>
           </a:xfrm>
           <a:prstGeom prst="rect">
             <a:avLst/>
@@ -12131,8 +14460,8 @@
         </p:nvSpPr>
         <p:spPr>
           <a:xfrm>
-            <a:off x="1481328" y="4663440"/>
-            <a:ext cx="7479792" cy="480060"/>
+            <a:off x="1481328" y="4690872"/>
+            <a:ext cx="7479792" cy="452628"/>
           </a:xfrm>
           <a:prstGeom prst="rect">
             <a:avLst/>
@@ -12148,14 +14477,14 @@
               <a:buNone/>
             </a:pPr>
             <a:r>
-              <a:rPr lang="en-US" sz="1050" b="1" i="1" dirty="0">
+              <a:rPr lang="en-US" sz="1050" dirty="0">
                 <a:solidFill>
                   <a:srgbClr val="1A3A6B"/>
                 </a:solidFill>
               </a:rPr>
               <a:t>No statistically significant aggregate effect of CCPA on approval rates (DiD = +3.24 pp, p = 0.54). Lenders appear to have adapted without restricting overall credit access in California.</a:t>
             </a:r>
-            <a:endParaRPr lang="en-US" sz="1050" b="1" i="1" dirty="0"/>
+            <a:endParaRPr lang="en-US" sz="1050" dirty="0"/>
           </a:p>
         </p:txBody>
       </p:sp>
@@ -12396,7 +14725,7 @@
               </a:rPr>
               <a:t>Do CCPA, VCDPA, and CPA each reduce mortgage approval rates in their respective states — and do effects persist over time?</a:t>
             </a:r>
-            <a:endParaRPr lang="en-US" sz="1050" b="1" dirty="0"/>
+            <a:endParaRPr lang="en-US" sz="1050" dirty="0"/>
           </a:p>
         </p:txBody>
       </p:sp>
@@ -13097,7 +15426,7 @@
         </p:nvSpPr>
         <p:spPr>
           <a:xfrm>
-            <a:off x="365760" y="3127248"/>
+            <a:off x="365760" y="3163824"/>
             <a:ext cx="5303520" cy="310896"/>
           </a:xfrm>
           <a:prstGeom prst="rect">
@@ -13129,17 +15458,11 @@
         <p:nvGraphicFramePr>
           <p:cNvPr id="26" name="Chart 0"/>
           <p:cNvGraphicFramePr/>
-          <p:nvPr>
-            <p:extLst>
-              <p:ext uri="{D42A27DB-BD31-4B8C-83A1-F6EECF244321}">
-                <p14:modId xmlns:p14="http://schemas.microsoft.com/office/powerpoint/2010/main" val="602083748"/>
-              </p:ext>
-            </p:extLst>
-          </p:nvPr>
+          <p:nvPr/>
         </p:nvGraphicFramePr>
         <p:xfrm>
-          <a:off x="365760" y="3406140"/>
-          <a:ext cx="5029200" cy="1220724"/>
+          <a:off x="365760" y="3511296"/>
+          <a:ext cx="5029200" cy="1417320"/>
         </p:xfrm>
         <a:graphic>
           <a:graphicData uri="http://schemas.openxmlformats.org/drawingml/2006/chart">
@@ -13155,8 +15478,8 @@
         </p:nvSpPr>
         <p:spPr>
           <a:xfrm>
-            <a:off x="5669280" y="3127248"/>
-            <a:ext cx="3200400" cy="1463040"/>
+            <a:off x="5742432" y="3099816"/>
+            <a:ext cx="3200400" cy="1783080"/>
           </a:xfrm>
           <a:prstGeom prst="rect">
             <a:avLst/>
@@ -13194,7 +15517,7 @@
         </p:nvSpPr>
         <p:spPr>
           <a:xfrm>
-            <a:off x="5775621" y="3154680"/>
+            <a:off x="5806440" y="3137483"/>
             <a:ext cx="2926080" cy="274320"/>
           </a:xfrm>
           <a:prstGeom prst="rect">
@@ -13230,7 +15553,7 @@
         </p:nvSpPr>
         <p:spPr>
           <a:xfrm>
-            <a:off x="5775621" y="3456432"/>
+            <a:off x="5806440" y="3429084"/>
             <a:ext cx="2926080" cy="1261872"/>
           </a:xfrm>
           <a:prstGeom prst="rect">
@@ -13425,14 +15748,14 @@
               <a:buNone/>
             </a:pPr>
             <a:r>
-              <a:rPr lang="en-US" sz="1050" b="1" i="1" dirty="0">
+              <a:rPr lang="en-US" sz="1050" dirty="0">
                 <a:solidFill>
                   <a:srgbClr val="1A3A6B"/>
                 </a:solidFill>
               </a:rPr>
               <a:t>CA (CCPA) shows a positive directional ATT — no adverse approval rate effect detected. VA and CO results are inconclusive with only 1 post-law year of data; requires 2024–2025 HMDA vintages to confirm.</a:t>
             </a:r>
-            <a:endParaRPr lang="en-US" sz="1050" b="1" i="1" dirty="0"/>
+            <a:endParaRPr lang="en-US" sz="1050" dirty="0"/>
           </a:p>
         </p:txBody>
       </p:sp>
@@ -13673,7 +15996,7 @@
               </a:rPr>
               <a:t>When did lenders change their behaviour relative to CCPA's enactment — and did approval rates trend differently before the law?</a:t>
             </a:r>
-            <a:endParaRPr lang="en-US" sz="1050" b="1" dirty="0"/>
+            <a:endParaRPr lang="en-US" sz="1050" dirty="0"/>
           </a:p>
         </p:txBody>
       </p:sp>
@@ -14387,14 +16710,14 @@
               <a:buNone/>
             </a:pPr>
             <a:r>
-              <a:rPr lang="en-US" sz="1050" b="1" i="1" dirty="0">
+              <a:rPr lang="en-US" sz="1050" dirty="0">
                 <a:solidFill>
                   <a:srgbClr val="1A6B3A"/>
                 </a:solidFill>
               </a:rPr>
               <a:t>Parallel trends assumption holds (pre-law coefficients near zero). Post-law coefficients trend positive — no adverse timing effect at CCPA enactment; lender adaptation appears gradual rather than abrupt.</a:t>
             </a:r>
-            <a:endParaRPr lang="en-US" sz="1050" b="1" i="1" dirty="0"/>
+            <a:endParaRPr lang="en-US" sz="1050" dirty="0"/>
           </a:p>
         </p:txBody>
       </p:sp>
@@ -14628,7 +16951,7 @@
               <a:buNone/>
             </a:pPr>
             <a:r>
-              <a:rPr lang="en-US" sz="1050" i="1" dirty="0">
+              <a:rPr lang="en-US" sz="1050" b="1" i="1" dirty="0">
                 <a:solidFill>
                   <a:srgbClr val="1A3A6B"/>
                 </a:solidFill>
@@ -15553,14 +17876,14 @@
               <a:buNone/>
             </a:pPr>
             <a:r>
-              <a:rPr lang="en-US" sz="1050" i="1" dirty="0">
+              <a:rPr lang="en-US" sz="1050" dirty="0">
                 <a:solidFill>
                   <a:srgbClr val="7A4A00"/>
                 </a:solidFill>
               </a:rPr>
               <a:t>Investor loan channel not yet tested definitively — requires loan-level HMDA microdata. If the CA × Post × InvestorLoan term is significantly negative, CCPA tightens data-driven underwriting for non-owner-occupied properties.</a:t>
             </a:r>
-            <a:endParaRPr lang="en-US" sz="1050" i="1" dirty="0"/>
+            <a:endParaRPr lang="en-US" sz="1050" dirty="0"/>
           </a:p>
         </p:txBody>
       </p:sp>
@@ -15801,7 +18124,7 @@
               </a:rPr>
               <a:t>Does the lending impact of CCPA fall disproportionately on lower-income borrowers — widening the credit-access gap by income?</a:t>
             </a:r>
-            <a:endParaRPr lang="en-US" sz="1050" b="1" dirty="0"/>
+            <a:endParaRPr lang="en-US" sz="1050" dirty="0"/>
           </a:p>
         </p:txBody>
       </p:sp>
@@ -15933,7 +18256,7 @@
         </p:nvSpPr>
         <p:spPr>
           <a:xfrm>
-            <a:off x="5577840" y="1463040"/>
+            <a:off x="5577840" y="1388974"/>
             <a:ext cx="3200400" cy="1078992"/>
           </a:xfrm>
           <a:prstGeom prst="rect">
@@ -15972,7 +18295,7 @@
         </p:nvSpPr>
         <p:spPr>
           <a:xfrm>
-            <a:off x="5577840" y="1463040"/>
+            <a:off x="5596044" y="1398403"/>
             <a:ext cx="54864" cy="1078992"/>
           </a:xfrm>
           <a:prstGeom prst="rect">
@@ -16041,7 +18364,7 @@
         <p:spPr>
           <a:xfrm>
             <a:off x="5715000" y="2056486"/>
-            <a:ext cx="2999232" cy="453177"/>
+            <a:ext cx="3063240" cy="453177"/>
           </a:xfrm>
           <a:prstGeom prst="rect">
             <a:avLst/>
@@ -16076,8 +18399,8 @@
         </p:nvSpPr>
         <p:spPr>
           <a:xfrm>
-            <a:off x="5715000" y="2110435"/>
-            <a:ext cx="2926080" cy="410017"/>
+            <a:off x="5705856" y="2081908"/>
+            <a:ext cx="2926080" cy="453177"/>
           </a:xfrm>
           <a:prstGeom prst="rect">
             <a:avLst/>
@@ -16126,7 +18449,7 @@
         </p:nvSpPr>
         <p:spPr>
           <a:xfrm>
-            <a:off x="5577840" y="2670048"/>
+            <a:off x="5577840" y="2536546"/>
             <a:ext cx="3200400" cy="1078992"/>
           </a:xfrm>
           <a:prstGeom prst="rect">
@@ -16165,7 +18488,7 @@
         </p:nvSpPr>
         <p:spPr>
           <a:xfrm>
-            <a:off x="5577840" y="2670048"/>
+            <a:off x="5596044" y="2559771"/>
             <a:ext cx="54864" cy="1078992"/>
           </a:xfrm>
           <a:prstGeom prst="rect">
@@ -16197,7 +18520,7 @@
         </p:nvSpPr>
         <p:spPr>
           <a:xfrm>
-            <a:off x="5715000" y="2743200"/>
+            <a:off x="5715000" y="2578243"/>
             <a:ext cx="2999232" cy="561076"/>
           </a:xfrm>
           <a:prstGeom prst="rect">
@@ -16233,8 +18556,8 @@
         </p:nvSpPr>
         <p:spPr>
           <a:xfrm>
-            <a:off x="5715000" y="3263494"/>
-            <a:ext cx="2999232" cy="453177"/>
+            <a:off x="5715000" y="3049159"/>
+            <a:ext cx="2999232" cy="667513"/>
           </a:xfrm>
           <a:prstGeom prst="rect">
             <a:avLst/>
@@ -16269,8 +18592,8 @@
         </p:nvSpPr>
         <p:spPr>
           <a:xfrm>
-            <a:off x="5715000" y="3317443"/>
-            <a:ext cx="2926080" cy="410017"/>
+            <a:off x="5669112" y="3306836"/>
+            <a:ext cx="3173220" cy="296448"/>
           </a:xfrm>
           <a:prstGeom prst="rect">
             <a:avLst/>
@@ -16291,24 +18614,10 @@
                   <a:srgbClr val="64748B"/>
                 </a:solidFill>
               </a:rPr>
-              <a:t>p = 0.95 — no statistically</a:t>
+              <a:t>  p = 0.95 — no statistically significant heterogeneity</a:t>
             </a:r>
             <a:endParaRPr lang="en-US" sz="950" dirty="0"/>
           </a:p>
-          <a:p>
-            <a:pPr marL="0" indent="0">
-              <a:buNone/>
-            </a:pPr>
-            <a:r>
-              <a:rPr lang="en-US" sz="950" dirty="0">
-                <a:solidFill>
-                  <a:srgbClr val="64748B"/>
-                </a:solidFill>
-              </a:rPr>
-              <a:t>significant heterogeneity</a:t>
-            </a:r>
-            <a:endParaRPr lang="en-US" sz="950" dirty="0"/>
-          </a:p>
         </p:txBody>
       </p:sp>
       <p:sp>
@@ -16319,8 +18628,8 @@
         </p:nvSpPr>
         <p:spPr>
           <a:xfrm>
-            <a:off x="5577840" y="3877056"/>
-            <a:ext cx="3200400" cy="1078992"/>
+            <a:off x="5605272" y="3741440"/>
+            <a:ext cx="3200400" cy="922000"/>
           </a:xfrm>
           <a:prstGeom prst="rect">
             <a:avLst/>
@@ -16358,7 +18667,7 @@
         </p:nvSpPr>
         <p:spPr>
           <a:xfrm>
-            <a:off x="5577840" y="3877056"/>
+            <a:off x="5603594" y="3816543"/>
             <a:ext cx="54864" cy="1078992"/>
           </a:xfrm>
           <a:prstGeom prst="rect">
@@ -16390,7 +18699,7 @@
         </p:nvSpPr>
         <p:spPr>
           <a:xfrm>
-            <a:off x="5715000" y="3950208"/>
+            <a:off x="5678424" y="3798968"/>
             <a:ext cx="2999232" cy="561076"/>
           </a:xfrm>
           <a:prstGeom prst="rect">
@@ -16426,7 +18735,7 @@
         </p:nvSpPr>
         <p:spPr>
           <a:xfrm>
-            <a:off x="5715000" y="4470502"/>
+            <a:off x="5705856" y="4220008"/>
             <a:ext cx="2999232" cy="453177"/>
           </a:xfrm>
           <a:prstGeom prst="rect">
@@ -16462,8 +18771,8 @@
         </p:nvSpPr>
         <p:spPr>
           <a:xfrm>
-            <a:off x="5715000" y="4524451"/>
-            <a:ext cx="2926080" cy="410017"/>
+            <a:off x="5715000" y="4379325"/>
+            <a:ext cx="3072384" cy="410017"/>
           </a:xfrm>
           <a:prstGeom prst="rect">
             <a:avLst/>
@@ -16484,21 +18793,7 @@
                   <a:srgbClr val="64748B"/>
                 </a:solidFill>
               </a:rPr>
-              <a:t>Aggregated panel limits</a:t>
-            </a:r>
-            <a:endParaRPr lang="en-US" sz="950" dirty="0"/>
-          </a:p>
-          <a:p>
-            <a:pPr marL="0" indent="0">
-              <a:buNone/>
-            </a:pPr>
-            <a:r>
-              <a:rPr lang="en-US" sz="950" dirty="0">
-                <a:solidFill>
-                  <a:srgbClr val="64748B"/>
-                </a:solidFill>
-              </a:rPr>
-              <a:t>statistical power</a:t>
+              <a:t>Aggregated panel limits statistical power</a:t>
             </a:r>
             <a:endParaRPr lang="en-US" sz="950" dirty="0"/>
           </a:p>
@@ -16548,8 +18843,8 @@
         </p:nvSpPr>
         <p:spPr>
           <a:xfrm>
-            <a:off x="0" y="4663440"/>
-            <a:ext cx="9144000" cy="480060"/>
+            <a:off x="0" y="4745736"/>
+            <a:ext cx="9144000" cy="397764"/>
           </a:xfrm>
           <a:prstGeom prst="rect">
             <a:avLst/>
@@ -16648,8 +18943,8 @@
         </p:nvSpPr>
         <p:spPr>
           <a:xfrm>
-            <a:off x="1481328" y="4663440"/>
-            <a:ext cx="7479792" cy="480060"/>
+            <a:off x="1481328" y="4815240"/>
+            <a:ext cx="7479792" cy="328259"/>
           </a:xfrm>
           <a:prstGeom prst="rect">
             <a:avLst/>
@@ -16665,14 +18960,14 @@
               <a:buNone/>
             </a:pPr>
             <a:r>
-              <a:rPr lang="en-US" sz="1050" b="1" i="1" dirty="0">
+              <a:rPr lang="en-US" sz="1050" dirty="0">
                 <a:solidFill>
                   <a:srgbClr val="7A4A00"/>
                 </a:solidFill>
               </a:rPr>
               <a:t>Directional evidence: low-income borrowers receive 2.53 pp less benefit than high-income (+1.32 pp vs +3.85 pp). Not statistically significant (F = 0.11, p = 0.95) — aggregated panel data lacks power. Warrants individual loan-level replication.</a:t>
             </a:r>
-            <a:endParaRPr lang="en-US" sz="1050" b="1" i="1" dirty="0"/>
+            <a:endParaRPr lang="en-US" sz="1050" dirty="0"/>
           </a:p>
         </p:txBody>
       </p:sp>
